--- a/index/designs/y7-l11/l4-routine-verbs/l4-routine-verbs.pptx
+++ b/index/designs/y7-l11/l4-routine-verbs/l4-routine-verbs.pptx
@@ -2591,9 +2591,6 @@
               </a:rPr>
               <a:t>L4 · 起居动词</a:t>
             </a:r>
-            <a:pPr algn="l" indent="0" marL="0">
-              <a:buNone/>
-            </a:pPr>
             <a:r>
               <a:rPr lang="en-US" sz="900" b="1" dirty="0">
                 <a:solidFill>
@@ -2605,9 +2602,6 @@
               </a:rPr>
               <a:t> |</a:t>
             </a:r>
-            <a:pPr algn="l" indent="0" marL="0">
-              <a:buNone/>
-            </a:pPr>
             <a:r>
               <a:rPr lang="en-US" sz="900" dirty="0">
                 <a:solidFill>
@@ -4150,9 +4144,6 @@
               </a:rPr>
               <a:t>L4 · 起居动词</a:t>
             </a:r>
-            <a:pPr algn="l" indent="0" marL="0">
-              <a:buNone/>
-            </a:pPr>
             <a:r>
               <a:rPr lang="en-US" sz="900" b="1" dirty="0">
                 <a:solidFill>
@@ -4164,9 +4155,6 @@
               </a:rPr>
               <a:t> |</a:t>
             </a:r>
-            <a:pPr algn="l" indent="0" marL="0">
-              <a:buNone/>
-            </a:pPr>
             <a:r>
               <a:rPr lang="en-US" sz="900" dirty="0">
                 <a:solidFill>
@@ -4372,9 +4360,6 @@
               </a:rPr>
               <a:t>1 我早上</a:t>
             </a:r>
-            <a:pPr algn="l" indent="0" marL="0">
-              <a:buNone/>
-            </a:pPr>
             <a:r>
               <a:rPr lang="en-US" sz="1200" b="1" dirty="0">
                 <a:solidFill>
@@ -4403,9 +4388,6 @@
               </a:rPr>
               <a:t>2 我六点三刻</a:t>
             </a:r>
-            <a:pPr algn="l" indent="0" marL="0">
-              <a:buNone/>
-            </a:pPr>
             <a:r>
               <a:rPr lang="en-US" sz="1200" b="1" dirty="0">
                 <a:solidFill>
@@ -4434,9 +4416,6 @@
               </a:rPr>
               <a:t>3 我</a:t>
             </a:r>
-            <a:pPr algn="l" indent="0" marL="0">
-              <a:buNone/>
-            </a:pPr>
             <a:r>
               <a:rPr lang="en-US" sz="1200" b="1" dirty="0">
                 <a:solidFill>
@@ -4465,9 +4444,6 @@
               </a:rPr>
               <a:t>4 我们八点</a:t>
             </a:r>
-            <a:pPr algn="l" indent="0" marL="0">
-              <a:buNone/>
-            </a:pPr>
             <a:r>
               <a:rPr lang="en-US" sz="1200" b="1" dirty="0">
                 <a:solidFill>
@@ -4496,9 +4472,6 @@
               </a:rPr>
               <a:t>5 我们</a:t>
             </a:r>
-            <a:pPr algn="l" indent="0" marL="0">
-              <a:buNone/>
-            </a:pPr>
             <a:r>
               <a:rPr lang="en-US" sz="1200" b="1" dirty="0">
                 <a:solidFill>
@@ -4527,9 +4500,6 @@
               </a:rPr>
               <a:t>6 我晚上九点半</a:t>
             </a:r>
-            <a:pPr algn="l" indent="0" marL="0">
-              <a:buNone/>
-            </a:pPr>
             <a:r>
               <a:rPr lang="en-US" sz="1200" b="1" dirty="0">
                 <a:solidFill>
@@ -5604,9 +5574,6 @@
               </a:rPr>
               <a:t>L4 · 起居动词</a:t>
             </a:r>
-            <a:pPr algn="l" indent="0" marL="0">
-              <a:buNone/>
-            </a:pPr>
             <a:r>
               <a:rPr lang="en-US" sz="900" b="1" dirty="0">
                 <a:solidFill>
@@ -5618,9 +5585,6 @@
               </a:rPr>
               <a:t> |</a:t>
             </a:r>
-            <a:pPr algn="l" indent="0" marL="0">
-              <a:buNone/>
-            </a:pPr>
             <a:r>
               <a:rPr lang="en-US" sz="900" dirty="0">
                 <a:solidFill>
@@ -5784,9 +5748,6 @@
               </a:rPr>
               <a:t>1 我早上</a:t>
             </a:r>
-            <a:pPr algn="l" indent="0" marL="0">
-              <a:buNone/>
-            </a:pPr>
             <a:r>
               <a:rPr lang="en-US" sz="1500" b="1" dirty="0">
                 <a:solidFill>
@@ -5798,9 +5759,6 @@
               </a:rPr>
               <a:t>六点半</a:t>
             </a:r>
-            <a:pPr algn="l" indent="0" marL="0">
-              <a:buNone/>
-            </a:pPr>
             <a:r>
               <a:rPr lang="en-US" sz="1500" b="1" dirty="0">
                 <a:solidFill>
@@ -5829,9 +5787,6 @@
               </a:rPr>
               <a:t>2 我六点三刻</a:t>
             </a:r>
-            <a:pPr algn="l" indent="0" marL="0">
-              <a:buNone/>
-            </a:pPr>
             <a:r>
               <a:rPr lang="en-US" sz="1500" b="1" dirty="0">
                 <a:solidFill>
@@ -5843,9 +5798,6 @@
               </a:rPr>
               <a:t>吃早饭</a:t>
             </a:r>
-            <a:pPr algn="l" indent="0" marL="0">
-              <a:buNone/>
-            </a:pPr>
             <a:r>
               <a:rPr lang="en-US" sz="1500" b="1" dirty="0">
                 <a:solidFill>
@@ -5874,9 +5826,6 @@
               </a:rPr>
               <a:t>3 我</a:t>
             </a:r>
-            <a:pPr algn="l" indent="0" marL="0">
-              <a:buNone/>
-            </a:pPr>
             <a:r>
               <a:rPr lang="en-US" sz="1500" b="1" dirty="0">
                 <a:solidFill>
@@ -5888,9 +5837,6 @@
               </a:rPr>
               <a:t>七点一刻</a:t>
             </a:r>
-            <a:pPr algn="l" indent="0" marL="0">
-              <a:buNone/>
-            </a:pPr>
             <a:r>
               <a:rPr lang="en-US" sz="1500" b="1" dirty="0">
                 <a:solidFill>
@@ -5919,9 +5865,6 @@
               </a:rPr>
               <a:t>4 我们八点</a:t>
             </a:r>
-            <a:pPr algn="l" indent="0" marL="0">
-              <a:buNone/>
-            </a:pPr>
             <a:r>
               <a:rPr lang="en-US" sz="1500" b="1" dirty="0">
                 <a:solidFill>
@@ -5933,9 +5876,6 @@
               </a:rPr>
               <a:t>上课</a:t>
             </a:r>
-            <a:pPr algn="l" indent="0" marL="0">
-              <a:buNone/>
-            </a:pPr>
             <a:r>
               <a:rPr lang="en-US" sz="1500" b="1" dirty="0">
                 <a:solidFill>
@@ -5964,9 +5904,6 @@
               </a:rPr>
               <a:t>5 我们</a:t>
             </a:r>
-            <a:pPr algn="l" indent="0" marL="0">
-              <a:buNone/>
-            </a:pPr>
             <a:r>
               <a:rPr lang="en-US" sz="1500" b="1" dirty="0">
                 <a:solidFill>
@@ -5978,9 +5915,6 @@
               </a:rPr>
               <a:t>下午三点半</a:t>
             </a:r>
-            <a:pPr algn="l" indent="0" marL="0">
-              <a:buNone/>
-            </a:pPr>
             <a:r>
               <a:rPr lang="en-US" sz="1500" b="1" dirty="0">
                 <a:solidFill>
@@ -6009,9 +5943,6 @@
               </a:rPr>
               <a:t>6 我晚上九点半</a:t>
             </a:r>
-            <a:pPr algn="l" indent="0" marL="0">
-              <a:buNone/>
-            </a:pPr>
             <a:r>
               <a:rPr lang="en-US" sz="1500" b="1" dirty="0">
                 <a:solidFill>
@@ -6023,9 +5954,6 @@
               </a:rPr>
               <a:t>睡觉</a:t>
             </a:r>
-            <a:pPr algn="l" indent="0" marL="0">
-              <a:buNone/>
-            </a:pPr>
             <a:r>
               <a:rPr lang="en-US" sz="1500" b="1" dirty="0">
                 <a:solidFill>
@@ -6207,9 +6135,6 @@
               </a:rPr>
               <a:t>L4 · 起居动词</a:t>
             </a:r>
-            <a:pPr algn="l" indent="0" marL="0">
-              <a:buNone/>
-            </a:pPr>
             <a:r>
               <a:rPr lang="en-US" sz="900" b="1" dirty="0">
                 <a:solidFill>
@@ -6221,9 +6146,6 @@
               </a:rPr>
               <a:t> |</a:t>
             </a:r>
-            <a:pPr algn="l" indent="0" marL="0">
-              <a:buNone/>
-            </a:pPr>
             <a:r>
               <a:rPr lang="en-US" sz="900" dirty="0">
                 <a:solidFill>
@@ -6429,9 +6351,6 @@
               </a:rPr>
               <a:t>我 </a:t>
             </a:r>
-            <a:pPr algn="ctr" indent="0" marL="0">
-              <a:buNone/>
-            </a:pPr>
             <a:r>
               <a:rPr lang="en-US" sz="1600" b="1" dirty="0">
                 <a:solidFill>
@@ -6443,9 +6362,6 @@
               </a:rPr>
               <a:t>+</a:t>
             </a:r>
-            <a:pPr algn="ctr" indent="0" marL="0">
-              <a:buNone/>
-            </a:pPr>
             <a:r>
               <a:rPr lang="en-US" sz="1600" dirty="0">
                 <a:solidFill>
@@ -6457,9 +6373,6 @@
               </a:rPr>
               <a:t> [time-of-day] </a:t>
             </a:r>
-            <a:pPr algn="ctr" indent="0" marL="0">
-              <a:buNone/>
-            </a:pPr>
             <a:r>
               <a:rPr lang="en-US" sz="1600" b="1" dirty="0">
                 <a:solidFill>
@@ -6471,9 +6384,6 @@
               </a:rPr>
               <a:t>+</a:t>
             </a:r>
-            <a:pPr algn="ctr" indent="0" marL="0">
-              <a:buNone/>
-            </a:pPr>
             <a:r>
               <a:rPr lang="en-US" sz="1600" dirty="0">
                 <a:solidFill>
@@ -6485,9 +6395,6 @@
               </a:rPr>
               <a:t> [time] </a:t>
             </a:r>
-            <a:pPr algn="ctr" indent="0" marL="0">
-              <a:buNone/>
-            </a:pPr>
             <a:r>
               <a:rPr lang="en-US" sz="1600" b="1" dirty="0">
                 <a:solidFill>
@@ -6499,9 +6406,6 @@
               </a:rPr>
               <a:t>+</a:t>
             </a:r>
-            <a:pPr algn="ctr" indent="0" marL="0">
-              <a:buNone/>
-            </a:pPr>
             <a:r>
               <a:rPr lang="en-US" sz="1600" dirty="0">
                 <a:solidFill>
@@ -6980,9 +6884,6 @@
               </a:rPr>
               <a:t>L4 · 起居动词</a:t>
             </a:r>
-            <a:pPr algn="l" indent="0" marL="0">
-              <a:buNone/>
-            </a:pPr>
             <a:r>
               <a:rPr lang="en-US" sz="900" b="1" dirty="0">
                 <a:solidFill>
@@ -6994,9 +6895,6 @@
               </a:rPr>
               <a:t> |</a:t>
             </a:r>
-            <a:pPr algn="l" indent="0" marL="0">
-              <a:buNone/>
-            </a:pPr>
             <a:r>
               <a:rPr lang="en-US" sz="900" dirty="0">
                 <a:solidFill>
@@ -8367,9 +8265,6 @@
               </a:rPr>
               <a:t>L4 · 起居动词</a:t>
             </a:r>
-            <a:pPr algn="l" indent="0" marL="0">
-              <a:buNone/>
-            </a:pPr>
             <a:r>
               <a:rPr lang="en-US" sz="900" b="1" dirty="0">
                 <a:solidFill>
@@ -8381,9 +8276,6 @@
               </a:rPr>
               <a:t> |</a:t>
             </a:r>
-            <a:pPr algn="l" indent="0" marL="0">
-              <a:buNone/>
-            </a:pPr>
             <a:r>
               <a:rPr lang="en-US" sz="900" dirty="0">
                 <a:solidFill>
@@ -9735,9 +9627,6 @@
               </a:rPr>
               <a:t>L4 · 起居动词</a:t>
             </a:r>
-            <a:pPr algn="l" indent="0" marL="0">
-              <a:buNone/>
-            </a:pPr>
             <a:r>
               <a:rPr lang="en-US" sz="900" b="1" dirty="0">
                 <a:solidFill>
@@ -9749,9 +9638,6 @@
               </a:rPr>
               <a:t> |</a:t>
             </a:r>
-            <a:pPr algn="l" indent="0" marL="0">
-              <a:buNone/>
-            </a:pPr>
             <a:r>
               <a:rPr lang="en-US" sz="900" dirty="0">
                 <a:solidFill>
@@ -10096,15 +9982,6 @@
               </a:rPr>
               <a:t>On your paper, write the routine verb you're </a:t>
             </a:r>
-            <a:pPr algn="l" indent="0" marL="0">
-              <a:lnSpc>
-                <a:spcPts val="1540"/>
-              </a:lnSpc>
-              <a:spcBef>
-                <a:spcPts val="400"/>
-              </a:spcBef>
-              <a:buNone/>
-            </a:pPr>
             <a:r>
               <a:rPr lang="en-US" sz="1100" b="1" dirty="0">
                 <a:solidFill>
@@ -10116,15 +9993,6 @@
               </a:rPr>
               <a:t>most confident</a:t>
             </a:r>
-            <a:pPr algn="l" indent="0" marL="0">
-              <a:lnSpc>
-                <a:spcPts val="1540"/>
-              </a:lnSpc>
-              <a:spcBef>
-                <a:spcPts val="400"/>
-              </a:spcBef>
-              <a:buNone/>
-            </a:pPr>
             <a:r>
               <a:rPr lang="en-US" sz="1100" dirty="0">
                 <a:solidFill>
@@ -10136,15 +10004,6 @@
               </a:rPr>
               <a:t> writing, and one you still need </a:t>
             </a:r>
-            <a:pPr algn="l" indent="0" marL="0">
-              <a:lnSpc>
-                <a:spcPts val="1540"/>
-              </a:lnSpc>
-              <a:spcBef>
-                <a:spcPts val="400"/>
-              </a:spcBef>
-              <a:buNone/>
-            </a:pPr>
             <a:r>
               <a:rPr lang="en-US" sz="1100" b="1" dirty="0">
                 <a:solidFill>
@@ -10156,15 +10015,6 @@
               </a:rPr>
               <a:t>practice</a:t>
             </a:r>
-            <a:pPr algn="l" indent="0" marL="0">
-              <a:lnSpc>
-                <a:spcPts val="1540"/>
-              </a:lnSpc>
-              <a:spcBef>
-                <a:spcPts val="400"/>
-              </a:spcBef>
-              <a:buNone/>
-            </a:pPr>
             <a:r>
               <a:rPr lang="en-US" sz="1100" dirty="0">
                 <a:solidFill>
@@ -10293,12 +10143,6 @@
               </a:rPr>
               <a:t>Write one sentence: what time do </a:t>
             </a:r>
-            <a:pPr algn="l" indent="0" marL="0">
-              <a:spcBef>
-                <a:spcPts val="400"/>
-              </a:spcBef>
-              <a:buNone/>
-            </a:pPr>
             <a:r>
               <a:rPr lang="en-US" sz="1300" b="1" dirty="0">
                 <a:solidFill>
@@ -10310,12 +10154,6 @@
               </a:rPr>
               <a:t>YOU</a:t>
             </a:r>
-            <a:pPr algn="l" indent="0" marL="0">
-              <a:spcBef>
-                <a:spcPts val="400"/>
-              </a:spcBef>
-              <a:buNone/>
-            </a:pPr>
             <a:r>
               <a:rPr lang="en-US" sz="1300" dirty="0">
                 <a:solidFill>
@@ -10891,15 +10729,6 @@
               </a:rPr>
               <a:t>Today: </a:t>
             </a:r>
-            <a:pPr algn="ctr" indent="0" marL="0">
-              <a:lnSpc>
-                <a:spcPts val="1800"/>
-              </a:lnSpc>
-              <a:spcBef>
-                <a:spcPts val="1800"/>
-              </a:spcBef>
-              <a:buNone/>
-            </a:pPr>
             <a:r>
               <a:rPr lang="en-US" sz="1200" b="1" dirty="0">
                 <a:solidFill>
@@ -10911,15 +10740,6 @@
               </a:rPr>
               <a:t>起床 / 吃早饭 / 去上学 / 上课 / 放学 / 睡觉</a:t>
             </a:r>
-            <a:pPr algn="ctr" indent="0" marL="0">
-              <a:lnSpc>
-                <a:spcPts val="1800"/>
-              </a:lnSpc>
-              <a:spcBef>
-                <a:spcPts val="1800"/>
-              </a:spcBef>
-              <a:buNone/>
-            </a:pPr>
             <a:r>
               <a:rPr lang="en-US" sz="1200" dirty="0">
                 <a:solidFill>
@@ -11085,9 +10905,6 @@
               </a:rPr>
               <a:t>L4 · 起居动词</a:t>
             </a:r>
-            <a:pPr algn="l" indent="0" marL="0">
-              <a:buNone/>
-            </a:pPr>
             <a:r>
               <a:rPr lang="en-US" sz="900" b="1" dirty="0">
                 <a:solidFill>
@@ -11099,9 +10916,6 @@
               </a:rPr>
               <a:t> |</a:t>
             </a:r>
-            <a:pPr algn="l" indent="0" marL="0">
-              <a:buNone/>
-            </a:pPr>
             <a:r>
               <a:rPr lang="en-US" sz="900" dirty="0">
                 <a:solidFill>
@@ -11790,9 +11604,6 @@
               </a:rPr>
               <a:t>L4 · 起居动词</a:t>
             </a:r>
-            <a:pPr algn="l" indent="0" marL="0">
-              <a:buNone/>
-            </a:pPr>
             <a:r>
               <a:rPr lang="en-US" sz="900" b="1" dirty="0">
                 <a:solidFill>
@@ -11804,9 +11615,6 @@
               </a:rPr>
               <a:t> |</a:t>
             </a:r>
-            <a:pPr algn="l" indent="0" marL="0">
-              <a:buNone/>
-            </a:pPr>
             <a:r>
               <a:rPr lang="en-US" sz="900" dirty="0">
                 <a:solidFill>
@@ -12618,9 +12426,6 @@
               </a:rPr>
               <a:t>L4 · 起居动词</a:t>
             </a:r>
-            <a:pPr algn="l" indent="0" marL="0">
-              <a:buNone/>
-            </a:pPr>
             <a:r>
               <a:rPr lang="en-US" sz="900" b="1" dirty="0">
                 <a:solidFill>
@@ -12632,9 +12437,6 @@
               </a:rPr>
               <a:t> |</a:t>
             </a:r>
-            <a:pPr algn="l" indent="0" marL="0">
-              <a:buNone/>
-            </a:pPr>
             <a:r>
               <a:rPr lang="en-US" sz="900" dirty="0">
                 <a:solidFill>
@@ -12942,9 +12744,6 @@
               </a:rPr>
               <a:t>I can write </a:t>
             </a:r>
-            <a:pPr algn="l" indent="0" marL="0">
-              <a:buNone/>
-            </a:pPr>
             <a:r>
               <a:rPr lang="en-US" sz="1200" b="1" dirty="0">
                 <a:solidFill>
@@ -12956,9 +12755,6 @@
               </a:rPr>
               <a:t>起床 / 吃早饭 / 去上学 / 上课 / 放学 / 睡觉</a:t>
             </a:r>
-            <a:pPr algn="l" indent="0" marL="0">
-              <a:buNone/>
-            </a:pPr>
             <a:r>
               <a:rPr lang="en-US" sz="1200" dirty="0">
                 <a:solidFill>
@@ -13422,9 +13218,6 @@
               </a:rPr>
               <a:t>L4 · 起居动词</a:t>
             </a:r>
-            <a:pPr algn="l" indent="0" marL="0">
-              <a:buNone/>
-            </a:pPr>
             <a:r>
               <a:rPr lang="en-US" sz="900" b="1" dirty="0">
                 <a:solidFill>
@@ -13436,9 +13229,6 @@
               </a:rPr>
               <a:t> |</a:t>
             </a:r>
-            <a:pPr algn="l" indent="0" marL="0">
-              <a:buNone/>
-            </a:pPr>
             <a:r>
               <a:rPr lang="en-US" sz="900" dirty="0">
                 <a:solidFill>
@@ -13644,10 +13434,68 @@
               </a:rPr>
               <a:t>起</a:t>
             </a:r>
+            <a:r>
+              <a:rPr lang="en-US" sz="1400" dirty="0">
+                <a:solidFill>
+                  <a:srgbClr val="1E2A38"/>
+                </a:solidFill>
+                <a:latin typeface="Noto Sans SC" pitchFamily="34" charset="0"/>
+                <a:ea typeface="Noto Sans SC" pitchFamily="34" charset="-122"/>
+                <a:cs typeface="Noto Sans SC" pitchFamily="34" charset="-120"/>
+              </a:rPr>
+              <a:t> </a:t>
+            </a:r>
+            <a:r>
+              <a:rPr lang="en-US" sz="1400" dirty="0">
+                <a:solidFill>
+                  <a:srgbClr val="3A7D8C"/>
+                </a:solidFill>
+                <a:latin typeface="Noto Sans SC" pitchFamily="34" charset="0"/>
+                <a:ea typeface="Noto Sans SC" pitchFamily="34" charset="-122"/>
+                <a:cs typeface="Noto Sans SC" pitchFamily="34" charset="-120"/>
+              </a:rPr>
+              <a:t>qǐ</a:t>
+            </a:r>
+            <a:r>
+              <a:rPr lang="en-US" sz="1400" dirty="0">
+                <a:solidFill>
+                  <a:srgbClr val="1E2A38"/>
+                </a:solidFill>
+                <a:latin typeface="Noto Sans SC" pitchFamily="34" charset="0"/>
+                <a:ea typeface="Noto Sans SC" pitchFamily="34" charset="-122"/>
+                <a:cs typeface="Noto Sans SC" pitchFamily="34" charset="-120"/>
+              </a:rPr>
+              <a:t> </a:t>
+            </a:r>
+            <a:r>
+              <a:rPr lang="en-US" sz="1400" dirty="0">
+                <a:solidFill>
+                  <a:srgbClr val="8B94A3"/>
+                </a:solidFill>
+                <a:latin typeface="Noto Sans SC" pitchFamily="34" charset="0"/>
+                <a:ea typeface="Noto Sans SC" pitchFamily="34" charset="-122"/>
+                <a:cs typeface="Noto Sans SC" pitchFamily="34" charset="-120"/>
+              </a:rPr>
+              <a:t>— get up</a:t>
+            </a:r>
+            <a:endParaRPr lang="en-US" sz="1400" dirty="0"/>
+          </a:p>
+          <a:p>
             <a:pPr algn="l" indent="0" marL="0">
               <a:buNone/>
             </a:pPr>
             <a:r>
+              <a:rPr lang="en-US" sz="1600" b="1" dirty="0">
+                <a:solidFill>
+                  <a:srgbClr val="1E2A38"/>
+                </a:solidFill>
+                <a:latin typeface="Noto Sans SC" pitchFamily="34" charset="0"/>
+                <a:ea typeface="Noto Sans SC" pitchFamily="34" charset="-122"/>
+                <a:cs typeface="Noto Sans SC" pitchFamily="34" charset="-120"/>
+              </a:rPr>
+              <a:t>床</a:t>
+            </a:r>
+            <a:r>
               <a:rPr lang="en-US" sz="1400" dirty="0">
                 <a:solidFill>
                   <a:srgbClr val="1E2A38"/>
@@ -13658,24 +13506,179 @@
               </a:rPr>
               <a:t> </a:t>
             </a:r>
+            <a:r>
+              <a:rPr lang="en-US" sz="1400" dirty="0">
+                <a:solidFill>
+                  <a:srgbClr val="3A7D8C"/>
+                </a:solidFill>
+                <a:latin typeface="Noto Sans SC" pitchFamily="34" charset="0"/>
+                <a:ea typeface="Noto Sans SC" pitchFamily="34" charset="-122"/>
+                <a:cs typeface="Noto Sans SC" pitchFamily="34" charset="-120"/>
+              </a:rPr>
+              <a:t>chuáng</a:t>
+            </a:r>
+            <a:r>
+              <a:rPr lang="en-US" sz="1400" dirty="0">
+                <a:solidFill>
+                  <a:srgbClr val="1E2A38"/>
+                </a:solidFill>
+                <a:latin typeface="Noto Sans SC" pitchFamily="34" charset="0"/>
+                <a:ea typeface="Noto Sans SC" pitchFamily="34" charset="-122"/>
+                <a:cs typeface="Noto Sans SC" pitchFamily="34" charset="-120"/>
+              </a:rPr>
+              <a:t> </a:t>
+            </a:r>
+            <a:r>
+              <a:rPr lang="en-US" sz="1400" dirty="0">
+                <a:solidFill>
+                  <a:srgbClr val="8B94A3"/>
+                </a:solidFill>
+                <a:latin typeface="Noto Sans SC" pitchFamily="34" charset="0"/>
+                <a:ea typeface="Noto Sans SC" pitchFamily="34" charset="-122"/>
+                <a:cs typeface="Noto Sans SC" pitchFamily="34" charset="-120"/>
+              </a:rPr>
+              <a:t>— bed</a:t>
+            </a:r>
+            <a:endParaRPr lang="en-US" sz="1400" dirty="0"/>
+          </a:p>
+          <a:p>
             <a:pPr algn="l" indent="0" marL="0">
               <a:buNone/>
             </a:pPr>
             <a:r>
+              <a:rPr lang="en-US" sz="1600" b="1" dirty="0">
+                <a:solidFill>
+                  <a:srgbClr val="C8943E"/>
+                </a:solidFill>
+                <a:latin typeface="Noto Sans SC" pitchFamily="34" charset="0"/>
+                <a:ea typeface="Noto Sans SC" pitchFamily="34" charset="-122"/>
+                <a:cs typeface="Noto Sans SC" pitchFamily="34" charset="-120"/>
+              </a:rPr>
+              <a:t>起床</a:t>
+            </a:r>
+            <a:r>
+              <a:rPr lang="en-US" sz="1400" b="1" dirty="0">
+                <a:solidFill>
+                  <a:srgbClr val="C8943E"/>
+                </a:solidFill>
+                <a:latin typeface="Noto Sans SC" pitchFamily="34" charset="0"/>
+                <a:ea typeface="Noto Sans SC" pitchFamily="34" charset="-122"/>
+                <a:cs typeface="Noto Sans SC" pitchFamily="34" charset="-120"/>
+              </a:rPr>
+              <a:t> </a:t>
+            </a:r>
+            <a:r>
+              <a:rPr lang="en-US" sz="1400" b="1" dirty="0">
+                <a:solidFill>
+                  <a:srgbClr val="C8943E"/>
+                </a:solidFill>
+                <a:latin typeface="Noto Sans SC" pitchFamily="34" charset="0"/>
+                <a:ea typeface="Noto Sans SC" pitchFamily="34" charset="-122"/>
+                <a:cs typeface="Noto Sans SC" pitchFamily="34" charset="-120"/>
+              </a:rPr>
+              <a:t>qǐ chuáng</a:t>
+            </a:r>
+            <a:r>
+              <a:rPr lang="en-US" sz="1400" b="1" dirty="0">
+                <a:solidFill>
+                  <a:srgbClr val="C8943E"/>
+                </a:solidFill>
+                <a:latin typeface="Noto Sans SC" pitchFamily="34" charset="0"/>
+                <a:ea typeface="Noto Sans SC" pitchFamily="34" charset="-122"/>
+                <a:cs typeface="Noto Sans SC" pitchFamily="34" charset="-120"/>
+              </a:rPr>
+              <a:t> </a:t>
+            </a:r>
+            <a:r>
+              <a:rPr lang="en-US" sz="1400" b="1" dirty="0">
+                <a:solidFill>
+                  <a:srgbClr val="C8943E"/>
+                </a:solidFill>
+                <a:latin typeface="Noto Sans SC" pitchFamily="34" charset="0"/>
+                <a:ea typeface="Noto Sans SC" pitchFamily="34" charset="-122"/>
+                <a:cs typeface="Noto Sans SC" pitchFamily="34" charset="-120"/>
+              </a:rPr>
+              <a:t>— get up</a:t>
+            </a:r>
+            <a:endParaRPr lang="en-US" sz="1400" dirty="0"/>
+          </a:p>
+          <a:p>
+            <a:pPr algn="l" indent="0" marL="0">
+              <a:buNone/>
+            </a:pPr>
+            <a:r>
+              <a:rPr lang="en-US" sz="1600" b="1" dirty="0">
+                <a:solidFill>
+                  <a:srgbClr val="1E2A38"/>
+                </a:solidFill>
+                <a:latin typeface="Noto Sans SC" pitchFamily="34" charset="0"/>
+                <a:ea typeface="Noto Sans SC" pitchFamily="34" charset="-122"/>
+                <a:cs typeface="Noto Sans SC" pitchFamily="34" charset="-120"/>
+              </a:rPr>
+              <a:t>吃</a:t>
+            </a:r>
+            <a:r>
               <a:rPr lang="en-US" sz="1400" dirty="0">
                 <a:solidFill>
+                  <a:srgbClr val="1E2A38"/>
+                </a:solidFill>
+                <a:latin typeface="Noto Sans SC" pitchFamily="34" charset="0"/>
+                <a:ea typeface="Noto Sans SC" pitchFamily="34" charset="-122"/>
+                <a:cs typeface="Noto Sans SC" pitchFamily="34" charset="-120"/>
+              </a:rPr>
+              <a:t> </a:t>
+            </a:r>
+            <a:r>
+              <a:rPr lang="en-US" sz="1400" dirty="0">
+                <a:solidFill>
                   <a:srgbClr val="3A7D8C"/>
                 </a:solidFill>
                 <a:latin typeface="Noto Sans SC" pitchFamily="34" charset="0"/>
                 <a:ea typeface="Noto Sans SC" pitchFamily="34" charset="-122"/>
                 <a:cs typeface="Noto Sans SC" pitchFamily="34" charset="-120"/>
               </a:rPr>
-              <a:t>qǐ</a:t>
-            </a:r>
+              <a:t>chī</a:t>
+            </a:r>
+            <a:r>
+              <a:rPr lang="en-US" sz="1400" dirty="0">
+                <a:solidFill>
+                  <a:srgbClr val="1E2A38"/>
+                </a:solidFill>
+                <a:latin typeface="Noto Sans SC" pitchFamily="34" charset="0"/>
+                <a:ea typeface="Noto Sans SC" pitchFamily="34" charset="-122"/>
+                <a:cs typeface="Noto Sans SC" pitchFamily="34" charset="-120"/>
+              </a:rPr>
+              <a:t> </a:t>
+            </a:r>
+            <a:r>
+              <a:rPr lang="en-US" sz="1400" dirty="0">
+                <a:solidFill>
+                  <a:srgbClr val="8B94A3"/>
+                </a:solidFill>
+                <a:latin typeface="Noto Sans SC" pitchFamily="34" charset="0"/>
+                <a:ea typeface="Noto Sans SC" pitchFamily="34" charset="-122"/>
+                <a:cs typeface="Noto Sans SC" pitchFamily="34" charset="-120"/>
+              </a:rPr>
+              <a:t>— eat</a:t>
+            </a:r>
+            <a:endParaRPr lang="en-US" sz="1400" dirty="0"/>
+          </a:p>
+          <a:p>
             <a:pPr algn="l" indent="0" marL="0">
               <a:buNone/>
             </a:pPr>
             <a:r>
+              <a:rPr lang="en-US" sz="1600" b="1" dirty="0">
+                <a:solidFill>
+                  <a:srgbClr val="1E2A38"/>
+                </a:solidFill>
+                <a:latin typeface="Noto Sans SC" pitchFamily="34" charset="0"/>
+                <a:ea typeface="Noto Sans SC" pitchFamily="34" charset="-122"/>
+                <a:cs typeface="Noto Sans SC" pitchFamily="34" charset="-120"/>
+              </a:rPr>
+              <a:t>饭</a:t>
+            </a:r>
+            <a:r>
               <a:rPr lang="en-US" sz="1400" dirty="0">
                 <a:solidFill>
                   <a:srgbClr val="1E2A38"/>
@@ -13686,43 +13689,142 @@
               </a:rPr>
               <a:t> </a:t>
             </a:r>
+            <a:r>
+              <a:rPr lang="en-US" sz="1400" dirty="0">
+                <a:solidFill>
+                  <a:srgbClr val="3A7D8C"/>
+                </a:solidFill>
+                <a:latin typeface="Noto Sans SC" pitchFamily="34" charset="0"/>
+                <a:ea typeface="Noto Sans SC" pitchFamily="34" charset="-122"/>
+                <a:cs typeface="Noto Sans SC" pitchFamily="34" charset="-120"/>
+              </a:rPr>
+              <a:t>fàn</a:t>
+            </a:r>
+            <a:r>
+              <a:rPr lang="en-US" sz="1400" dirty="0">
+                <a:solidFill>
+                  <a:srgbClr val="1E2A38"/>
+                </a:solidFill>
+                <a:latin typeface="Noto Sans SC" pitchFamily="34" charset="0"/>
+                <a:ea typeface="Noto Sans SC" pitchFamily="34" charset="-122"/>
+                <a:cs typeface="Noto Sans SC" pitchFamily="34" charset="-120"/>
+              </a:rPr>
+              <a:t> </a:t>
+            </a:r>
+            <a:r>
+              <a:rPr lang="en-US" sz="1400" dirty="0">
+                <a:solidFill>
+                  <a:srgbClr val="8B94A3"/>
+                </a:solidFill>
+                <a:latin typeface="Noto Sans SC" pitchFamily="34" charset="0"/>
+                <a:ea typeface="Noto Sans SC" pitchFamily="34" charset="-122"/>
+                <a:cs typeface="Noto Sans SC" pitchFamily="34" charset="-120"/>
+              </a:rPr>
+              <a:t>— cooked rice; meal</a:t>
+            </a:r>
+            <a:endParaRPr lang="en-US" sz="1400" dirty="0"/>
+          </a:p>
+          <a:p>
             <a:pPr algn="l" indent="0" marL="0">
               <a:buNone/>
             </a:pPr>
             <a:r>
+              <a:rPr lang="en-US" sz="1600" b="1" dirty="0">
+                <a:solidFill>
+                  <a:srgbClr val="C8943E"/>
+                </a:solidFill>
+                <a:latin typeface="Noto Sans SC" pitchFamily="34" charset="0"/>
+                <a:ea typeface="Noto Sans SC" pitchFamily="34" charset="-122"/>
+                <a:cs typeface="Noto Sans SC" pitchFamily="34" charset="-120"/>
+              </a:rPr>
+              <a:t>早饭</a:t>
+            </a:r>
+            <a:r>
+              <a:rPr lang="en-US" sz="1400" b="1" dirty="0">
+                <a:solidFill>
+                  <a:srgbClr val="C8943E"/>
+                </a:solidFill>
+                <a:latin typeface="Noto Sans SC" pitchFamily="34" charset="0"/>
+                <a:ea typeface="Noto Sans SC" pitchFamily="34" charset="-122"/>
+                <a:cs typeface="Noto Sans SC" pitchFamily="34" charset="-120"/>
+              </a:rPr>
+              <a:t> </a:t>
+            </a:r>
+            <a:r>
+              <a:rPr lang="en-US" sz="1400" b="1" dirty="0">
+                <a:solidFill>
+                  <a:srgbClr val="C8943E"/>
+                </a:solidFill>
+                <a:latin typeface="Noto Sans SC" pitchFamily="34" charset="0"/>
+                <a:ea typeface="Noto Sans SC" pitchFamily="34" charset="-122"/>
+                <a:cs typeface="Noto Sans SC" pitchFamily="34" charset="-120"/>
+              </a:rPr>
+              <a:t>zǎo fàn</a:t>
+            </a:r>
+            <a:r>
+              <a:rPr lang="en-US" sz="1400" b="1" dirty="0">
+                <a:solidFill>
+                  <a:srgbClr val="C8943E"/>
+                </a:solidFill>
+                <a:latin typeface="Noto Sans SC" pitchFamily="34" charset="0"/>
+                <a:ea typeface="Noto Sans SC" pitchFamily="34" charset="-122"/>
+                <a:cs typeface="Noto Sans SC" pitchFamily="34" charset="-120"/>
+              </a:rPr>
+              <a:t> </a:t>
+            </a:r>
+            <a:r>
+              <a:rPr lang="en-US" sz="1400" b="1" dirty="0">
+                <a:solidFill>
+                  <a:srgbClr val="C8943E"/>
+                </a:solidFill>
+                <a:latin typeface="Noto Sans SC" pitchFamily="34" charset="0"/>
+                <a:ea typeface="Noto Sans SC" pitchFamily="34" charset="-122"/>
+                <a:cs typeface="Noto Sans SC" pitchFamily="34" charset="-120"/>
+              </a:rPr>
+              <a:t>— breakfast</a:t>
+            </a:r>
+            <a:endParaRPr lang="en-US" sz="1400" dirty="0"/>
+          </a:p>
+          <a:p>
+            <a:pPr algn="l" indent="0" marL="0">
+              <a:buNone/>
+            </a:pPr>
+            <a:r>
+              <a:rPr lang="en-US" sz="1600" b="1" dirty="0">
+                <a:solidFill>
+                  <a:srgbClr val="1E2A38"/>
+                </a:solidFill>
+                <a:latin typeface="Noto Sans SC" pitchFamily="34" charset="0"/>
+                <a:ea typeface="Noto Sans SC" pitchFamily="34" charset="-122"/>
+                <a:cs typeface="Noto Sans SC" pitchFamily="34" charset="-120"/>
+              </a:rPr>
+              <a:t>去</a:t>
+            </a:r>
+            <a:r>
               <a:rPr lang="en-US" sz="1400" dirty="0">
                 <a:solidFill>
-                  <a:srgbClr val="8B94A3"/>
-                </a:solidFill>
-                <a:latin typeface="Noto Sans SC" pitchFamily="34" charset="0"/>
-                <a:ea typeface="Noto Sans SC" pitchFamily="34" charset="-122"/>
-                <a:cs typeface="Noto Sans SC" pitchFamily="34" charset="-120"/>
-              </a:rPr>
-              <a:t>— get up</a:t>
-            </a:r>
-            <a:endParaRPr lang="en-US" sz="1400" dirty="0"/>
-          </a:p>
-          <a:p>
-            <a:pPr algn="l" indent="0" marL="0">
-              <a:buNone/>
-            </a:pPr>
-            <a:r>
-              <a:rPr lang="en-US" sz="1600" b="1" dirty="0">
-                <a:solidFill>
                   <a:srgbClr val="1E2A38"/>
                 </a:solidFill>
                 <a:latin typeface="Noto Sans SC" pitchFamily="34" charset="0"/>
                 <a:ea typeface="Noto Sans SC" pitchFamily="34" charset="-122"/>
                 <a:cs typeface="Noto Sans SC" pitchFamily="34" charset="-120"/>
               </a:rPr>
-              <a:t>床</a:t>
-            </a:r>
-            <a:pPr algn="l" indent="0" marL="0">
-              <a:buNone/>
-            </a:pPr>
+              <a:t> </a:t>
+            </a:r>
             <a:r>
               <a:rPr lang="en-US" sz="1400" dirty="0">
                 <a:solidFill>
+                  <a:srgbClr val="3A7D8C"/>
+                </a:solidFill>
+                <a:latin typeface="Noto Sans SC" pitchFamily="34" charset="0"/>
+                <a:ea typeface="Noto Sans SC" pitchFamily="34" charset="-122"/>
+                <a:cs typeface="Noto Sans SC" pitchFamily="34" charset="-120"/>
+              </a:rPr>
+              <a:t>qù</a:t>
+            </a:r>
+            <a:r>
+              <a:rPr lang="en-US" sz="1400" dirty="0">
+                <a:solidFill>
                   <a:srgbClr val="1E2A38"/>
                 </a:solidFill>
                 <a:latin typeface="Noto Sans SC" pitchFamily="34" charset="0"/>
@@ -13731,402 +13833,6 @@
               </a:rPr>
               <a:t> </a:t>
             </a:r>
-            <a:pPr algn="l" indent="0" marL="0">
-              <a:buNone/>
-            </a:pPr>
-            <a:r>
-              <a:rPr lang="en-US" sz="1400" dirty="0">
-                <a:solidFill>
-                  <a:srgbClr val="3A7D8C"/>
-                </a:solidFill>
-                <a:latin typeface="Noto Sans SC" pitchFamily="34" charset="0"/>
-                <a:ea typeface="Noto Sans SC" pitchFamily="34" charset="-122"/>
-                <a:cs typeface="Noto Sans SC" pitchFamily="34" charset="-120"/>
-              </a:rPr>
-              <a:t>chuáng</a:t>
-            </a:r>
-            <a:pPr algn="l" indent="0" marL="0">
-              <a:buNone/>
-            </a:pPr>
-            <a:r>
-              <a:rPr lang="en-US" sz="1400" dirty="0">
-                <a:solidFill>
-                  <a:srgbClr val="1E2A38"/>
-                </a:solidFill>
-                <a:latin typeface="Noto Sans SC" pitchFamily="34" charset="0"/>
-                <a:ea typeface="Noto Sans SC" pitchFamily="34" charset="-122"/>
-                <a:cs typeface="Noto Sans SC" pitchFamily="34" charset="-120"/>
-              </a:rPr>
-              <a:t> </a:t>
-            </a:r>
-            <a:pPr algn="l" indent="0" marL="0">
-              <a:buNone/>
-            </a:pPr>
-            <a:r>
-              <a:rPr lang="en-US" sz="1400" dirty="0">
-                <a:solidFill>
-                  <a:srgbClr val="8B94A3"/>
-                </a:solidFill>
-                <a:latin typeface="Noto Sans SC" pitchFamily="34" charset="0"/>
-                <a:ea typeface="Noto Sans SC" pitchFamily="34" charset="-122"/>
-                <a:cs typeface="Noto Sans SC" pitchFamily="34" charset="-120"/>
-              </a:rPr>
-              <a:t>— bed</a:t>
-            </a:r>
-            <a:endParaRPr lang="en-US" sz="1400" dirty="0"/>
-          </a:p>
-          <a:p>
-            <a:pPr algn="l" indent="0" marL="0">
-              <a:buNone/>
-            </a:pPr>
-            <a:r>
-              <a:rPr lang="en-US" sz="1600" b="1" dirty="0">
-                <a:solidFill>
-                  <a:srgbClr val="C8943E"/>
-                </a:solidFill>
-                <a:latin typeface="Noto Sans SC" pitchFamily="34" charset="0"/>
-                <a:ea typeface="Noto Sans SC" pitchFamily="34" charset="-122"/>
-                <a:cs typeface="Noto Sans SC" pitchFamily="34" charset="-120"/>
-              </a:rPr>
-              <a:t>起床</a:t>
-            </a:r>
-            <a:pPr algn="l" indent="0" marL="0">
-              <a:buNone/>
-            </a:pPr>
-            <a:r>
-              <a:rPr lang="en-US" sz="1400" b="1" dirty="0">
-                <a:solidFill>
-                  <a:srgbClr val="C8943E"/>
-                </a:solidFill>
-                <a:latin typeface="Noto Sans SC" pitchFamily="34" charset="0"/>
-                <a:ea typeface="Noto Sans SC" pitchFamily="34" charset="-122"/>
-                <a:cs typeface="Noto Sans SC" pitchFamily="34" charset="-120"/>
-              </a:rPr>
-              <a:t> </a:t>
-            </a:r>
-            <a:pPr algn="l" indent="0" marL="0">
-              <a:buNone/>
-            </a:pPr>
-            <a:r>
-              <a:rPr lang="en-US" sz="1400" b="1" dirty="0">
-                <a:solidFill>
-                  <a:srgbClr val="C8943E"/>
-                </a:solidFill>
-                <a:latin typeface="Noto Sans SC" pitchFamily="34" charset="0"/>
-                <a:ea typeface="Noto Sans SC" pitchFamily="34" charset="-122"/>
-                <a:cs typeface="Noto Sans SC" pitchFamily="34" charset="-120"/>
-              </a:rPr>
-              <a:t>qǐ chuáng</a:t>
-            </a:r>
-            <a:pPr algn="l" indent="0" marL="0">
-              <a:buNone/>
-            </a:pPr>
-            <a:r>
-              <a:rPr lang="en-US" sz="1400" b="1" dirty="0">
-                <a:solidFill>
-                  <a:srgbClr val="C8943E"/>
-                </a:solidFill>
-                <a:latin typeface="Noto Sans SC" pitchFamily="34" charset="0"/>
-                <a:ea typeface="Noto Sans SC" pitchFamily="34" charset="-122"/>
-                <a:cs typeface="Noto Sans SC" pitchFamily="34" charset="-120"/>
-              </a:rPr>
-              <a:t> </a:t>
-            </a:r>
-            <a:pPr algn="l" indent="0" marL="0">
-              <a:buNone/>
-            </a:pPr>
-            <a:r>
-              <a:rPr lang="en-US" sz="1400" b="1" dirty="0">
-                <a:solidFill>
-                  <a:srgbClr val="C8943E"/>
-                </a:solidFill>
-                <a:latin typeface="Noto Sans SC" pitchFamily="34" charset="0"/>
-                <a:ea typeface="Noto Sans SC" pitchFamily="34" charset="-122"/>
-                <a:cs typeface="Noto Sans SC" pitchFamily="34" charset="-120"/>
-              </a:rPr>
-              <a:t>— get up</a:t>
-            </a:r>
-            <a:endParaRPr lang="en-US" sz="1400" dirty="0"/>
-          </a:p>
-          <a:p>
-            <a:pPr algn="l" indent="0" marL="0">
-              <a:buNone/>
-            </a:pPr>
-            <a:r>
-              <a:rPr lang="en-US" sz="1600" b="1" dirty="0">
-                <a:solidFill>
-                  <a:srgbClr val="1E2A38"/>
-                </a:solidFill>
-                <a:latin typeface="Noto Sans SC" pitchFamily="34" charset="0"/>
-                <a:ea typeface="Noto Sans SC" pitchFamily="34" charset="-122"/>
-                <a:cs typeface="Noto Sans SC" pitchFamily="34" charset="-120"/>
-              </a:rPr>
-              <a:t>吃</a:t>
-            </a:r>
-            <a:pPr algn="l" indent="0" marL="0">
-              <a:buNone/>
-            </a:pPr>
-            <a:r>
-              <a:rPr lang="en-US" sz="1400" dirty="0">
-                <a:solidFill>
-                  <a:srgbClr val="1E2A38"/>
-                </a:solidFill>
-                <a:latin typeface="Noto Sans SC" pitchFamily="34" charset="0"/>
-                <a:ea typeface="Noto Sans SC" pitchFamily="34" charset="-122"/>
-                <a:cs typeface="Noto Sans SC" pitchFamily="34" charset="-120"/>
-              </a:rPr>
-              <a:t> </a:t>
-            </a:r>
-            <a:pPr algn="l" indent="0" marL="0">
-              <a:buNone/>
-            </a:pPr>
-            <a:r>
-              <a:rPr lang="en-US" sz="1400" dirty="0">
-                <a:solidFill>
-                  <a:srgbClr val="3A7D8C"/>
-                </a:solidFill>
-                <a:latin typeface="Noto Sans SC" pitchFamily="34" charset="0"/>
-                <a:ea typeface="Noto Sans SC" pitchFamily="34" charset="-122"/>
-                <a:cs typeface="Noto Sans SC" pitchFamily="34" charset="-120"/>
-              </a:rPr>
-              <a:t>chī</a:t>
-            </a:r>
-            <a:pPr algn="l" indent="0" marL="0">
-              <a:buNone/>
-            </a:pPr>
-            <a:r>
-              <a:rPr lang="en-US" sz="1400" dirty="0">
-                <a:solidFill>
-                  <a:srgbClr val="1E2A38"/>
-                </a:solidFill>
-                <a:latin typeface="Noto Sans SC" pitchFamily="34" charset="0"/>
-                <a:ea typeface="Noto Sans SC" pitchFamily="34" charset="-122"/>
-                <a:cs typeface="Noto Sans SC" pitchFamily="34" charset="-120"/>
-              </a:rPr>
-              <a:t> </a:t>
-            </a:r>
-            <a:pPr algn="l" indent="0" marL="0">
-              <a:buNone/>
-            </a:pPr>
-            <a:r>
-              <a:rPr lang="en-US" sz="1400" dirty="0">
-                <a:solidFill>
-                  <a:srgbClr val="8B94A3"/>
-                </a:solidFill>
-                <a:latin typeface="Noto Sans SC" pitchFamily="34" charset="0"/>
-                <a:ea typeface="Noto Sans SC" pitchFamily="34" charset="-122"/>
-                <a:cs typeface="Noto Sans SC" pitchFamily="34" charset="-120"/>
-              </a:rPr>
-              <a:t>— eat</a:t>
-            </a:r>
-            <a:endParaRPr lang="en-US" sz="1400" dirty="0"/>
-          </a:p>
-          <a:p>
-            <a:pPr algn="l" indent="0" marL="0">
-              <a:buNone/>
-            </a:pPr>
-            <a:r>
-              <a:rPr lang="en-US" sz="1600" b="1" dirty="0">
-                <a:solidFill>
-                  <a:srgbClr val="1E2A38"/>
-                </a:solidFill>
-                <a:latin typeface="Noto Sans SC" pitchFamily="34" charset="0"/>
-                <a:ea typeface="Noto Sans SC" pitchFamily="34" charset="-122"/>
-                <a:cs typeface="Noto Sans SC" pitchFamily="34" charset="-120"/>
-              </a:rPr>
-              <a:t>饭</a:t>
-            </a:r>
-            <a:pPr algn="l" indent="0" marL="0">
-              <a:buNone/>
-            </a:pPr>
-            <a:r>
-              <a:rPr lang="en-US" sz="1400" dirty="0">
-                <a:solidFill>
-                  <a:srgbClr val="1E2A38"/>
-                </a:solidFill>
-                <a:latin typeface="Noto Sans SC" pitchFamily="34" charset="0"/>
-                <a:ea typeface="Noto Sans SC" pitchFamily="34" charset="-122"/>
-                <a:cs typeface="Noto Sans SC" pitchFamily="34" charset="-120"/>
-              </a:rPr>
-              <a:t> </a:t>
-            </a:r>
-            <a:pPr algn="l" indent="0" marL="0">
-              <a:buNone/>
-            </a:pPr>
-            <a:r>
-              <a:rPr lang="en-US" sz="1400" dirty="0">
-                <a:solidFill>
-                  <a:srgbClr val="3A7D8C"/>
-                </a:solidFill>
-                <a:latin typeface="Noto Sans SC" pitchFamily="34" charset="0"/>
-                <a:ea typeface="Noto Sans SC" pitchFamily="34" charset="-122"/>
-                <a:cs typeface="Noto Sans SC" pitchFamily="34" charset="-120"/>
-              </a:rPr>
-              <a:t>fàn</a:t>
-            </a:r>
-            <a:pPr algn="l" indent="0" marL="0">
-              <a:buNone/>
-            </a:pPr>
-            <a:r>
-              <a:rPr lang="en-US" sz="1400" dirty="0">
-                <a:solidFill>
-                  <a:srgbClr val="1E2A38"/>
-                </a:solidFill>
-                <a:latin typeface="Noto Sans SC" pitchFamily="34" charset="0"/>
-                <a:ea typeface="Noto Sans SC" pitchFamily="34" charset="-122"/>
-                <a:cs typeface="Noto Sans SC" pitchFamily="34" charset="-120"/>
-              </a:rPr>
-              <a:t> </a:t>
-            </a:r>
-            <a:pPr algn="l" indent="0" marL="0">
-              <a:buNone/>
-            </a:pPr>
-            <a:r>
-              <a:rPr lang="en-US" sz="1400" dirty="0">
-                <a:solidFill>
-                  <a:srgbClr val="8B94A3"/>
-                </a:solidFill>
-                <a:latin typeface="Noto Sans SC" pitchFamily="34" charset="0"/>
-                <a:ea typeface="Noto Sans SC" pitchFamily="34" charset="-122"/>
-                <a:cs typeface="Noto Sans SC" pitchFamily="34" charset="-120"/>
-              </a:rPr>
-              <a:t>— cooked rice; meal</a:t>
-            </a:r>
-            <a:endParaRPr lang="en-US" sz="1400" dirty="0"/>
-          </a:p>
-          <a:p>
-            <a:pPr algn="l" indent="0" marL="0">
-              <a:buNone/>
-            </a:pPr>
-            <a:r>
-              <a:rPr lang="en-US" sz="1600" b="1" dirty="0">
-                <a:solidFill>
-                  <a:srgbClr val="C8943E"/>
-                </a:solidFill>
-                <a:latin typeface="Noto Sans SC" pitchFamily="34" charset="0"/>
-                <a:ea typeface="Noto Sans SC" pitchFamily="34" charset="-122"/>
-                <a:cs typeface="Noto Sans SC" pitchFamily="34" charset="-120"/>
-              </a:rPr>
-              <a:t>早饭</a:t>
-            </a:r>
-            <a:pPr algn="l" indent="0" marL="0">
-              <a:buNone/>
-            </a:pPr>
-            <a:r>
-              <a:rPr lang="en-US" sz="1400" b="1" dirty="0">
-                <a:solidFill>
-                  <a:srgbClr val="C8943E"/>
-                </a:solidFill>
-                <a:latin typeface="Noto Sans SC" pitchFamily="34" charset="0"/>
-                <a:ea typeface="Noto Sans SC" pitchFamily="34" charset="-122"/>
-                <a:cs typeface="Noto Sans SC" pitchFamily="34" charset="-120"/>
-              </a:rPr>
-              <a:t> </a:t>
-            </a:r>
-            <a:pPr algn="l" indent="0" marL="0">
-              <a:buNone/>
-            </a:pPr>
-            <a:r>
-              <a:rPr lang="en-US" sz="1400" b="1" dirty="0">
-                <a:solidFill>
-                  <a:srgbClr val="C8943E"/>
-                </a:solidFill>
-                <a:latin typeface="Noto Sans SC" pitchFamily="34" charset="0"/>
-                <a:ea typeface="Noto Sans SC" pitchFamily="34" charset="-122"/>
-                <a:cs typeface="Noto Sans SC" pitchFamily="34" charset="-120"/>
-              </a:rPr>
-              <a:t>zǎo fàn</a:t>
-            </a:r>
-            <a:pPr algn="l" indent="0" marL="0">
-              <a:buNone/>
-            </a:pPr>
-            <a:r>
-              <a:rPr lang="en-US" sz="1400" b="1" dirty="0">
-                <a:solidFill>
-                  <a:srgbClr val="C8943E"/>
-                </a:solidFill>
-                <a:latin typeface="Noto Sans SC" pitchFamily="34" charset="0"/>
-                <a:ea typeface="Noto Sans SC" pitchFamily="34" charset="-122"/>
-                <a:cs typeface="Noto Sans SC" pitchFamily="34" charset="-120"/>
-              </a:rPr>
-              <a:t> </a:t>
-            </a:r>
-            <a:pPr algn="l" indent="0" marL="0">
-              <a:buNone/>
-            </a:pPr>
-            <a:r>
-              <a:rPr lang="en-US" sz="1400" b="1" dirty="0">
-                <a:solidFill>
-                  <a:srgbClr val="C8943E"/>
-                </a:solidFill>
-                <a:latin typeface="Noto Sans SC" pitchFamily="34" charset="0"/>
-                <a:ea typeface="Noto Sans SC" pitchFamily="34" charset="-122"/>
-                <a:cs typeface="Noto Sans SC" pitchFamily="34" charset="-120"/>
-              </a:rPr>
-              <a:t>— breakfast</a:t>
-            </a:r>
-            <a:endParaRPr lang="en-US" sz="1400" dirty="0"/>
-          </a:p>
-          <a:p>
-            <a:pPr algn="l" indent="0" marL="0">
-              <a:buNone/>
-            </a:pPr>
-            <a:r>
-              <a:rPr lang="en-US" sz="1600" b="1" dirty="0">
-                <a:solidFill>
-                  <a:srgbClr val="1E2A38"/>
-                </a:solidFill>
-                <a:latin typeface="Noto Sans SC" pitchFamily="34" charset="0"/>
-                <a:ea typeface="Noto Sans SC" pitchFamily="34" charset="-122"/>
-                <a:cs typeface="Noto Sans SC" pitchFamily="34" charset="-120"/>
-              </a:rPr>
-              <a:t>去</a:t>
-            </a:r>
-            <a:pPr algn="l" indent="0" marL="0">
-              <a:buNone/>
-            </a:pPr>
-            <a:r>
-              <a:rPr lang="en-US" sz="1400" dirty="0">
-                <a:solidFill>
-                  <a:srgbClr val="1E2A38"/>
-                </a:solidFill>
-                <a:latin typeface="Noto Sans SC" pitchFamily="34" charset="0"/>
-                <a:ea typeface="Noto Sans SC" pitchFamily="34" charset="-122"/>
-                <a:cs typeface="Noto Sans SC" pitchFamily="34" charset="-120"/>
-              </a:rPr>
-              <a:t> </a:t>
-            </a:r>
-            <a:pPr algn="l" indent="0" marL="0">
-              <a:buNone/>
-            </a:pPr>
-            <a:r>
-              <a:rPr lang="en-US" sz="1400" dirty="0">
-                <a:solidFill>
-                  <a:srgbClr val="3A7D8C"/>
-                </a:solidFill>
-                <a:latin typeface="Noto Sans SC" pitchFamily="34" charset="0"/>
-                <a:ea typeface="Noto Sans SC" pitchFamily="34" charset="-122"/>
-                <a:cs typeface="Noto Sans SC" pitchFamily="34" charset="-120"/>
-              </a:rPr>
-              <a:t>qù</a:t>
-            </a:r>
-            <a:pPr algn="l" indent="0" marL="0">
-              <a:buNone/>
-            </a:pPr>
-            <a:r>
-              <a:rPr lang="en-US" sz="1400" dirty="0">
-                <a:solidFill>
-                  <a:srgbClr val="1E2A38"/>
-                </a:solidFill>
-                <a:latin typeface="Noto Sans SC" pitchFamily="34" charset="0"/>
-                <a:ea typeface="Noto Sans SC" pitchFamily="34" charset="-122"/>
-                <a:cs typeface="Noto Sans SC" pitchFamily="34" charset="-120"/>
-              </a:rPr>
-              <a:t> </a:t>
-            </a:r>
-            <a:pPr algn="l" indent="0" marL="0">
-              <a:buNone/>
-            </a:pPr>
             <a:r>
               <a:rPr lang="en-US" sz="1400" dirty="0">
                 <a:solidFill>
@@ -14308,9 +14014,6 @@
               </a:rPr>
               <a:t>L4 · 起居动词</a:t>
             </a:r>
-            <a:pPr algn="l" indent="0" marL="0">
-              <a:buNone/>
-            </a:pPr>
             <a:r>
               <a:rPr lang="en-US" sz="900" b="1" dirty="0">
                 <a:solidFill>
@@ -14322,9 +14025,6 @@
               </a:rPr>
               <a:t> |</a:t>
             </a:r>
-            <a:pPr algn="l" indent="0" marL="0">
-              <a:buNone/>
-            </a:pPr>
             <a:r>
               <a:rPr lang="en-US" sz="900" dirty="0">
                 <a:solidFill>
@@ -14530,10 +14230,119 @@
               </a:rPr>
               <a:t>上学</a:t>
             </a:r>
+            <a:r>
+              <a:rPr lang="en-US" sz="1300" b="1" dirty="0">
+                <a:solidFill>
+                  <a:srgbClr val="C8943E"/>
+                </a:solidFill>
+                <a:latin typeface="Noto Sans SC" pitchFamily="34" charset="0"/>
+                <a:ea typeface="Noto Sans SC" pitchFamily="34" charset="-122"/>
+                <a:cs typeface="Noto Sans SC" pitchFamily="34" charset="-120"/>
+              </a:rPr>
+              <a:t> </a:t>
+            </a:r>
+            <a:r>
+              <a:rPr lang="en-US" sz="1300" b="1" dirty="0">
+                <a:solidFill>
+                  <a:srgbClr val="C8943E"/>
+                </a:solidFill>
+                <a:latin typeface="Noto Sans SC" pitchFamily="34" charset="0"/>
+                <a:ea typeface="Noto Sans SC" pitchFamily="34" charset="-122"/>
+                <a:cs typeface="Noto Sans SC" pitchFamily="34" charset="-120"/>
+              </a:rPr>
+              <a:t>shàng xué</a:t>
+            </a:r>
+            <a:endParaRPr lang="en-US" sz="1300" dirty="0"/>
+          </a:p>
+          <a:p>
             <a:pPr algn="l" indent="0" marL="0">
               <a:buNone/>
             </a:pPr>
             <a:r>
+              <a:rPr lang="en-US" sz="900" dirty="0">
+                <a:solidFill>
+                  <a:srgbClr val="8B94A3"/>
+                </a:solidFill>
+                <a:latin typeface="Noto Sans SC" pitchFamily="34" charset="0"/>
+                <a:ea typeface="Noto Sans SC" pitchFamily="34" charset="-122"/>
+                <a:cs typeface="Noto Sans SC" pitchFamily="34" charset="-120"/>
+              </a:rPr>
+              <a:t>go to school; attend school</a:t>
+            </a:r>
+            <a:endParaRPr lang="en-US" sz="1300" dirty="0"/>
+          </a:p>
+          <a:p>
+            <a:pPr algn="l" indent="0" marL="0">
+              <a:buNone/>
+            </a:pPr>
+            <a:r>
+              <a:rPr lang="en-US" sz="1500" b="1" dirty="0">
+                <a:solidFill>
+                  <a:srgbClr val="1E2A38"/>
+                </a:solidFill>
+                <a:latin typeface="Noto Sans SC" pitchFamily="34" charset="0"/>
+                <a:ea typeface="Noto Sans SC" pitchFamily="34" charset="-122"/>
+                <a:cs typeface="Noto Sans SC" pitchFamily="34" charset="-120"/>
+              </a:rPr>
+              <a:t>课</a:t>
+            </a:r>
+            <a:r>
+              <a:rPr lang="en-US" sz="1300" dirty="0">
+                <a:solidFill>
+                  <a:srgbClr val="1E2A38"/>
+                </a:solidFill>
+                <a:latin typeface="Noto Sans SC" pitchFamily="34" charset="0"/>
+                <a:ea typeface="Noto Sans SC" pitchFamily="34" charset="-122"/>
+                <a:cs typeface="Noto Sans SC" pitchFamily="34" charset="-120"/>
+              </a:rPr>
+              <a:t> </a:t>
+            </a:r>
+            <a:r>
+              <a:rPr lang="en-US" sz="1300" dirty="0">
+                <a:solidFill>
+                  <a:srgbClr val="3A7D8C"/>
+                </a:solidFill>
+                <a:latin typeface="Noto Sans SC" pitchFamily="34" charset="0"/>
+                <a:ea typeface="Noto Sans SC" pitchFamily="34" charset="-122"/>
+                <a:cs typeface="Noto Sans SC" pitchFamily="34" charset="-120"/>
+              </a:rPr>
+              <a:t>kè</a:t>
+            </a:r>
+            <a:endParaRPr lang="en-US" sz="1300" dirty="0"/>
+          </a:p>
+          <a:p>
+            <a:pPr algn="l" indent="0" marL="0">
+              <a:buNone/>
+            </a:pPr>
+            <a:r>
+              <a:rPr lang="en-US" sz="900" dirty="0">
+                <a:solidFill>
+                  <a:srgbClr val="8B94A3"/>
+                </a:solidFill>
+                <a:latin typeface="Noto Sans SC" pitchFamily="34" charset="0"/>
+                <a:ea typeface="Noto Sans SC" pitchFamily="34" charset="-122"/>
+                <a:cs typeface="Noto Sans SC" pitchFamily="34" charset="-120"/>
+              </a:rPr>
+              <a:t>class; period</a:t>
+            </a:r>
+            <a:endParaRPr lang="en-US" sz="1300" dirty="0"/>
+          </a:p>
+          <a:p>
+            <a:pPr algn="l" indent="0" marL="0">
+              <a:buNone/>
+            </a:pPr>
+            <a:r>
+              <a:rPr lang="en-US" sz="1500" b="1" dirty="0">
+                <a:solidFill>
+                  <a:srgbClr val="C8943E"/>
+                </a:solidFill>
+                <a:latin typeface="Noto Sans SC" pitchFamily="34" charset="0"/>
+                <a:ea typeface="Noto Sans SC" pitchFamily="34" charset="-122"/>
+                <a:cs typeface="Noto Sans SC" pitchFamily="34" charset="-120"/>
+              </a:rPr>
+              <a:t>上课</a:t>
+            </a:r>
+            <a:r>
               <a:rPr lang="en-US" sz="1300" b="1" dirty="0">
                 <a:solidFill>
                   <a:srgbClr val="C8943E"/>
@@ -14544,19 +14353,33 @@
               </a:rPr>
               <a:t> </a:t>
             </a:r>
+            <a:r>
+              <a:rPr lang="en-US" sz="1300" b="1" dirty="0">
+                <a:solidFill>
+                  <a:srgbClr val="C8943E"/>
+                </a:solidFill>
+                <a:latin typeface="Noto Sans SC" pitchFamily="34" charset="0"/>
+                <a:ea typeface="Noto Sans SC" pitchFamily="34" charset="-122"/>
+                <a:cs typeface="Noto Sans SC" pitchFamily="34" charset="-120"/>
+              </a:rPr>
+              <a:t>shàng kè</a:t>
+            </a:r>
+            <a:endParaRPr lang="en-US" sz="1300" dirty="0"/>
+          </a:p>
+          <a:p>
             <a:pPr algn="l" indent="0" marL="0">
               <a:buNone/>
             </a:pPr>
             <a:r>
-              <a:rPr lang="en-US" sz="1300" b="1" dirty="0">
-                <a:solidFill>
-                  <a:srgbClr val="C8943E"/>
-                </a:solidFill>
-                <a:latin typeface="Noto Sans SC" pitchFamily="34" charset="0"/>
-                <a:ea typeface="Noto Sans SC" pitchFamily="34" charset="-122"/>
-                <a:cs typeface="Noto Sans SC" pitchFamily="34" charset="-120"/>
-              </a:rPr>
-              <a:t>shàng xué</a:t>
+              <a:rPr lang="en-US" sz="900" dirty="0">
+                <a:solidFill>
+                  <a:srgbClr val="8B94A3"/>
+                </a:solidFill>
+                <a:latin typeface="Noto Sans SC" pitchFamily="34" charset="0"/>
+                <a:ea typeface="Noto Sans SC" pitchFamily="34" charset="-122"/>
+                <a:cs typeface="Noto Sans SC" pitchFamily="34" charset="-120"/>
+              </a:rPr>
+              <a:t>attend class</a:t>
             </a:r>
             <a:endParaRPr lang="en-US" sz="1300" dirty="0"/>
           </a:p>
@@ -14565,23 +14388,6 @@
               <a:buNone/>
             </a:pPr>
             <a:r>
-              <a:rPr lang="en-US" sz="900" dirty="0">
-                <a:solidFill>
-                  <a:srgbClr val="8B94A3"/>
-                </a:solidFill>
-                <a:latin typeface="Noto Sans SC" pitchFamily="34" charset="0"/>
-                <a:ea typeface="Noto Sans SC" pitchFamily="34" charset="-122"/>
-                <a:cs typeface="Noto Sans SC" pitchFamily="34" charset="-120"/>
-              </a:rPr>
-              <a:t>go to school; attend school</a:t>
-            </a:r>
-            <a:endParaRPr lang="en-US" sz="1300" dirty="0"/>
-          </a:p>
-          <a:p>
-            <a:pPr algn="l" indent="0" marL="0">
-              <a:buNone/>
-            </a:pPr>
-            <a:r>
               <a:rPr lang="en-US" sz="1500" b="1" dirty="0">
                 <a:solidFill>
                   <a:srgbClr val="1E2A38"/>
@@ -14590,11 +14396,8 @@
                 <a:ea typeface="Noto Sans SC" pitchFamily="34" charset="-122"/>
                 <a:cs typeface="Noto Sans SC" pitchFamily="34" charset="-120"/>
               </a:rPr>
-              <a:t>课</a:t>
-            </a:r>
-            <a:pPr algn="l" indent="0" marL="0">
-              <a:buNone/>
-            </a:pPr>
+              <a:t>放</a:t>
+            </a:r>
             <a:r>
               <a:rPr lang="en-US" sz="1300" dirty="0">
                 <a:solidFill>
@@ -14606,133 +14409,6 @@
               </a:rPr>
               <a:t> </a:t>
             </a:r>
-            <a:pPr algn="l" indent="0" marL="0">
-              <a:buNone/>
-            </a:pPr>
-            <a:r>
-              <a:rPr lang="en-US" sz="1300" dirty="0">
-                <a:solidFill>
-                  <a:srgbClr val="3A7D8C"/>
-                </a:solidFill>
-                <a:latin typeface="Noto Sans SC" pitchFamily="34" charset="0"/>
-                <a:ea typeface="Noto Sans SC" pitchFamily="34" charset="-122"/>
-                <a:cs typeface="Noto Sans SC" pitchFamily="34" charset="-120"/>
-              </a:rPr>
-              <a:t>kè</a:t>
-            </a:r>
-            <a:endParaRPr lang="en-US" sz="1300" dirty="0"/>
-          </a:p>
-          <a:p>
-            <a:pPr algn="l" indent="0" marL="0">
-              <a:buNone/>
-            </a:pPr>
-            <a:r>
-              <a:rPr lang="en-US" sz="900" dirty="0">
-                <a:solidFill>
-                  <a:srgbClr val="8B94A3"/>
-                </a:solidFill>
-                <a:latin typeface="Noto Sans SC" pitchFamily="34" charset="0"/>
-                <a:ea typeface="Noto Sans SC" pitchFamily="34" charset="-122"/>
-                <a:cs typeface="Noto Sans SC" pitchFamily="34" charset="-120"/>
-              </a:rPr>
-              <a:t>class; period</a:t>
-            </a:r>
-            <a:endParaRPr lang="en-US" sz="1300" dirty="0"/>
-          </a:p>
-          <a:p>
-            <a:pPr algn="l" indent="0" marL="0">
-              <a:buNone/>
-            </a:pPr>
-            <a:r>
-              <a:rPr lang="en-US" sz="1500" b="1" dirty="0">
-                <a:solidFill>
-                  <a:srgbClr val="C8943E"/>
-                </a:solidFill>
-                <a:latin typeface="Noto Sans SC" pitchFamily="34" charset="0"/>
-                <a:ea typeface="Noto Sans SC" pitchFamily="34" charset="-122"/>
-                <a:cs typeface="Noto Sans SC" pitchFamily="34" charset="-120"/>
-              </a:rPr>
-              <a:t>上课</a:t>
-            </a:r>
-            <a:pPr algn="l" indent="0" marL="0">
-              <a:buNone/>
-            </a:pPr>
-            <a:r>
-              <a:rPr lang="en-US" sz="1300" b="1" dirty="0">
-                <a:solidFill>
-                  <a:srgbClr val="C8943E"/>
-                </a:solidFill>
-                <a:latin typeface="Noto Sans SC" pitchFamily="34" charset="0"/>
-                <a:ea typeface="Noto Sans SC" pitchFamily="34" charset="-122"/>
-                <a:cs typeface="Noto Sans SC" pitchFamily="34" charset="-120"/>
-              </a:rPr>
-              <a:t> </a:t>
-            </a:r>
-            <a:pPr algn="l" indent="0" marL="0">
-              <a:buNone/>
-            </a:pPr>
-            <a:r>
-              <a:rPr lang="en-US" sz="1300" b="1" dirty="0">
-                <a:solidFill>
-                  <a:srgbClr val="C8943E"/>
-                </a:solidFill>
-                <a:latin typeface="Noto Sans SC" pitchFamily="34" charset="0"/>
-                <a:ea typeface="Noto Sans SC" pitchFamily="34" charset="-122"/>
-                <a:cs typeface="Noto Sans SC" pitchFamily="34" charset="-120"/>
-              </a:rPr>
-              <a:t>shàng kè</a:t>
-            </a:r>
-            <a:endParaRPr lang="en-US" sz="1300" dirty="0"/>
-          </a:p>
-          <a:p>
-            <a:pPr algn="l" indent="0" marL="0">
-              <a:buNone/>
-            </a:pPr>
-            <a:r>
-              <a:rPr lang="en-US" sz="900" dirty="0">
-                <a:solidFill>
-                  <a:srgbClr val="8B94A3"/>
-                </a:solidFill>
-                <a:latin typeface="Noto Sans SC" pitchFamily="34" charset="0"/>
-                <a:ea typeface="Noto Sans SC" pitchFamily="34" charset="-122"/>
-                <a:cs typeface="Noto Sans SC" pitchFamily="34" charset="-120"/>
-              </a:rPr>
-              <a:t>attend class</a:t>
-            </a:r>
-            <a:endParaRPr lang="en-US" sz="1300" dirty="0"/>
-          </a:p>
-          <a:p>
-            <a:pPr algn="l" indent="0" marL="0">
-              <a:buNone/>
-            </a:pPr>
-            <a:r>
-              <a:rPr lang="en-US" sz="1500" b="1" dirty="0">
-                <a:solidFill>
-                  <a:srgbClr val="1E2A38"/>
-                </a:solidFill>
-                <a:latin typeface="Noto Sans SC" pitchFamily="34" charset="0"/>
-                <a:ea typeface="Noto Sans SC" pitchFamily="34" charset="-122"/>
-                <a:cs typeface="Noto Sans SC" pitchFamily="34" charset="-120"/>
-              </a:rPr>
-              <a:t>放</a:t>
-            </a:r>
-            <a:pPr algn="l" indent="0" marL="0">
-              <a:buNone/>
-            </a:pPr>
-            <a:r>
-              <a:rPr lang="en-US" sz="1300" dirty="0">
-                <a:solidFill>
-                  <a:srgbClr val="1E2A38"/>
-                </a:solidFill>
-                <a:latin typeface="Noto Sans SC" pitchFamily="34" charset="0"/>
-                <a:ea typeface="Noto Sans SC" pitchFamily="34" charset="-122"/>
-                <a:cs typeface="Noto Sans SC" pitchFamily="34" charset="-120"/>
-              </a:rPr>
-              <a:t> </a:t>
-            </a:r>
-            <a:pPr algn="l" indent="0" marL="0">
-              <a:buNone/>
-            </a:pPr>
             <a:r>
               <a:rPr lang="en-US" sz="1300" dirty="0">
                 <a:solidFill>
@@ -14832,10 +14508,175 @@
               </a:rPr>
               <a:t>放学</a:t>
             </a:r>
+            <a:r>
+              <a:rPr lang="en-US" sz="1300" b="1" dirty="0">
+                <a:solidFill>
+                  <a:srgbClr val="C8943E"/>
+                </a:solidFill>
+                <a:latin typeface="Noto Sans SC" pitchFamily="34" charset="0"/>
+                <a:ea typeface="Noto Sans SC" pitchFamily="34" charset="-122"/>
+                <a:cs typeface="Noto Sans SC" pitchFamily="34" charset="-120"/>
+              </a:rPr>
+              <a:t> </a:t>
+            </a:r>
+            <a:r>
+              <a:rPr lang="en-US" sz="1300" b="1" dirty="0">
+                <a:solidFill>
+                  <a:srgbClr val="C8943E"/>
+                </a:solidFill>
+                <a:latin typeface="Noto Sans SC" pitchFamily="34" charset="0"/>
+                <a:ea typeface="Noto Sans SC" pitchFamily="34" charset="-122"/>
+                <a:cs typeface="Noto Sans SC" pitchFamily="34" charset="-120"/>
+              </a:rPr>
+              <a:t>fàng xué</a:t>
+            </a:r>
+            <a:endParaRPr lang="en-US" sz="1300" dirty="0"/>
+          </a:p>
+          <a:p>
             <a:pPr algn="l" indent="0" marL="0">
               <a:buNone/>
             </a:pPr>
             <a:r>
+              <a:rPr lang="en-US" sz="900" dirty="0">
+                <a:solidFill>
+                  <a:srgbClr val="8B94A3"/>
+                </a:solidFill>
+                <a:latin typeface="Noto Sans SC" pitchFamily="34" charset="0"/>
+                <a:ea typeface="Noto Sans SC" pitchFamily="34" charset="-122"/>
+                <a:cs typeface="Noto Sans SC" pitchFamily="34" charset="-120"/>
+              </a:rPr>
+              <a:t>classes are over</a:t>
+            </a:r>
+            <a:endParaRPr lang="en-US" sz="1300" dirty="0"/>
+          </a:p>
+          <a:p>
+            <a:pPr algn="l" indent="0" marL="0">
+              <a:buNone/>
+            </a:pPr>
+            <a:r>
+              <a:rPr lang="en-US" sz="1500" b="1" dirty="0">
+                <a:solidFill>
+                  <a:srgbClr val="1E2A38"/>
+                </a:solidFill>
+                <a:latin typeface="Noto Sans SC" pitchFamily="34" charset="0"/>
+                <a:ea typeface="Noto Sans SC" pitchFamily="34" charset="-122"/>
+                <a:cs typeface="Noto Sans SC" pitchFamily="34" charset="-120"/>
+              </a:rPr>
+              <a:t>睡</a:t>
+            </a:r>
+            <a:r>
+              <a:rPr lang="en-US" sz="1300" dirty="0">
+                <a:solidFill>
+                  <a:srgbClr val="1E2A38"/>
+                </a:solidFill>
+                <a:latin typeface="Noto Sans SC" pitchFamily="34" charset="0"/>
+                <a:ea typeface="Noto Sans SC" pitchFamily="34" charset="-122"/>
+                <a:cs typeface="Noto Sans SC" pitchFamily="34" charset="-120"/>
+              </a:rPr>
+              <a:t> </a:t>
+            </a:r>
+            <a:r>
+              <a:rPr lang="en-US" sz="1300" dirty="0">
+                <a:solidFill>
+                  <a:srgbClr val="3A7D8C"/>
+                </a:solidFill>
+                <a:latin typeface="Noto Sans SC" pitchFamily="34" charset="0"/>
+                <a:ea typeface="Noto Sans SC" pitchFamily="34" charset="-122"/>
+                <a:cs typeface="Noto Sans SC" pitchFamily="34" charset="-120"/>
+              </a:rPr>
+              <a:t>shuì</a:t>
+            </a:r>
+            <a:endParaRPr lang="en-US" sz="1300" dirty="0"/>
+          </a:p>
+          <a:p>
+            <a:pPr algn="l" indent="0" marL="0">
+              <a:buNone/>
+            </a:pPr>
+            <a:r>
+              <a:rPr lang="en-US" sz="900" dirty="0">
+                <a:solidFill>
+                  <a:srgbClr val="8B94A3"/>
+                </a:solidFill>
+                <a:latin typeface="Noto Sans SC" pitchFamily="34" charset="0"/>
+                <a:ea typeface="Noto Sans SC" pitchFamily="34" charset="-122"/>
+                <a:cs typeface="Noto Sans SC" pitchFamily="34" charset="-120"/>
+              </a:rPr>
+              <a:t>sleep</a:t>
+            </a:r>
+            <a:endParaRPr lang="en-US" sz="1300" dirty="0"/>
+          </a:p>
+          <a:p>
+            <a:pPr algn="l" indent="0" marL="0">
+              <a:buNone/>
+            </a:pPr>
+            <a:r>
+              <a:rPr lang="en-US" sz="1500" b="1" dirty="0">
+                <a:solidFill>
+                  <a:srgbClr val="1E2A38"/>
+                </a:solidFill>
+                <a:latin typeface="Noto Sans SC" pitchFamily="34" charset="0"/>
+                <a:ea typeface="Noto Sans SC" pitchFamily="34" charset="-122"/>
+                <a:cs typeface="Noto Sans SC" pitchFamily="34" charset="-120"/>
+              </a:rPr>
+              <a:t>觉</a:t>
+            </a:r>
+            <a:r>
+              <a:rPr lang="en-US" sz="1300" dirty="0">
+                <a:solidFill>
+                  <a:srgbClr val="1E2A38"/>
+                </a:solidFill>
+                <a:latin typeface="Noto Sans SC" pitchFamily="34" charset="0"/>
+                <a:ea typeface="Noto Sans SC" pitchFamily="34" charset="-122"/>
+                <a:cs typeface="Noto Sans SC" pitchFamily="34" charset="-120"/>
+              </a:rPr>
+              <a:t> </a:t>
+            </a:r>
+            <a:r>
+              <a:rPr lang="en-US" sz="1300" dirty="0">
+                <a:solidFill>
+                  <a:srgbClr val="3A7D8C"/>
+                </a:solidFill>
+                <a:latin typeface="Noto Sans SC" pitchFamily="34" charset="0"/>
+                <a:ea typeface="Noto Sans SC" pitchFamily="34" charset="-122"/>
+                <a:cs typeface="Noto Sans SC" pitchFamily="34" charset="-120"/>
+              </a:rPr>
+              <a:t>jiào</a:t>
+            </a:r>
+            <a:endParaRPr lang="en-US" sz="1300" dirty="0"/>
+          </a:p>
+          <a:p>
+            <a:pPr algn="l" indent="0" marL="0">
+              <a:buNone/>
+            </a:pPr>
+            <a:r>
+              <a:rPr lang="en-US" sz="900" dirty="0">
+                <a:solidFill>
+                  <a:srgbClr val="8B94A3"/>
+                </a:solidFill>
+                <a:latin typeface="Noto Sans SC" pitchFamily="34" charset="0"/>
+                <a:ea typeface="Noto Sans SC" pitchFamily="34" charset="-122"/>
+                <a:cs typeface="Noto Sans SC" pitchFamily="34" charset="-120"/>
+              </a:rPr>
+              <a:t>sleep</a:t>
+            </a:r>
+            <a:endParaRPr lang="en-US" sz="1300" dirty="0"/>
+          </a:p>
+          <a:p>
+            <a:pPr algn="l" indent="0" marL="0">
+              <a:buNone/>
+            </a:pPr>
+            <a:r>
+              <a:rPr lang="en-US" sz="1500" b="1" dirty="0">
+                <a:solidFill>
+                  <a:srgbClr val="C8943E"/>
+                </a:solidFill>
+                <a:latin typeface="Noto Sans SC" pitchFamily="34" charset="0"/>
+                <a:ea typeface="Noto Sans SC" pitchFamily="34" charset="-122"/>
+                <a:cs typeface="Noto Sans SC" pitchFamily="34" charset="-120"/>
+              </a:rPr>
+              <a:t>睡觉</a:t>
+            </a:r>
+            <a:r>
               <a:rPr lang="en-US" sz="1300" b="1" dirty="0">
                 <a:solidFill>
                   <a:srgbClr val="C8943E"/>
@@ -14846,195 +14687,6 @@
               </a:rPr>
               <a:t> </a:t>
             </a:r>
-            <a:pPr algn="l" indent="0" marL="0">
-              <a:buNone/>
-            </a:pPr>
-            <a:r>
-              <a:rPr lang="en-US" sz="1300" b="1" dirty="0">
-                <a:solidFill>
-                  <a:srgbClr val="C8943E"/>
-                </a:solidFill>
-                <a:latin typeface="Noto Sans SC" pitchFamily="34" charset="0"/>
-                <a:ea typeface="Noto Sans SC" pitchFamily="34" charset="-122"/>
-                <a:cs typeface="Noto Sans SC" pitchFamily="34" charset="-120"/>
-              </a:rPr>
-              <a:t>fàng xué</a:t>
-            </a:r>
-            <a:endParaRPr lang="en-US" sz="1300" dirty="0"/>
-          </a:p>
-          <a:p>
-            <a:pPr algn="l" indent="0" marL="0">
-              <a:buNone/>
-            </a:pPr>
-            <a:r>
-              <a:rPr lang="en-US" sz="900" dirty="0">
-                <a:solidFill>
-                  <a:srgbClr val="8B94A3"/>
-                </a:solidFill>
-                <a:latin typeface="Noto Sans SC" pitchFamily="34" charset="0"/>
-                <a:ea typeface="Noto Sans SC" pitchFamily="34" charset="-122"/>
-                <a:cs typeface="Noto Sans SC" pitchFamily="34" charset="-120"/>
-              </a:rPr>
-              <a:t>classes are over</a:t>
-            </a:r>
-            <a:endParaRPr lang="en-US" sz="1300" dirty="0"/>
-          </a:p>
-          <a:p>
-            <a:pPr algn="l" indent="0" marL="0">
-              <a:buNone/>
-            </a:pPr>
-            <a:r>
-              <a:rPr lang="en-US" sz="1500" b="1" dirty="0">
-                <a:solidFill>
-                  <a:srgbClr val="1E2A38"/>
-                </a:solidFill>
-                <a:latin typeface="Noto Sans SC" pitchFamily="34" charset="0"/>
-                <a:ea typeface="Noto Sans SC" pitchFamily="34" charset="-122"/>
-                <a:cs typeface="Noto Sans SC" pitchFamily="34" charset="-120"/>
-              </a:rPr>
-              <a:t>睡</a:t>
-            </a:r>
-            <a:pPr algn="l" indent="0" marL="0">
-              <a:buNone/>
-            </a:pPr>
-            <a:r>
-              <a:rPr lang="en-US" sz="1300" dirty="0">
-                <a:solidFill>
-                  <a:srgbClr val="1E2A38"/>
-                </a:solidFill>
-                <a:latin typeface="Noto Sans SC" pitchFamily="34" charset="0"/>
-                <a:ea typeface="Noto Sans SC" pitchFamily="34" charset="-122"/>
-                <a:cs typeface="Noto Sans SC" pitchFamily="34" charset="-120"/>
-              </a:rPr>
-              <a:t> </a:t>
-            </a:r>
-            <a:pPr algn="l" indent="0" marL="0">
-              <a:buNone/>
-            </a:pPr>
-            <a:r>
-              <a:rPr lang="en-US" sz="1300" dirty="0">
-                <a:solidFill>
-                  <a:srgbClr val="3A7D8C"/>
-                </a:solidFill>
-                <a:latin typeface="Noto Sans SC" pitchFamily="34" charset="0"/>
-                <a:ea typeface="Noto Sans SC" pitchFamily="34" charset="-122"/>
-                <a:cs typeface="Noto Sans SC" pitchFamily="34" charset="-120"/>
-              </a:rPr>
-              <a:t>shuì</a:t>
-            </a:r>
-            <a:endParaRPr lang="en-US" sz="1300" dirty="0"/>
-          </a:p>
-          <a:p>
-            <a:pPr algn="l" indent="0" marL="0">
-              <a:buNone/>
-            </a:pPr>
-            <a:r>
-              <a:rPr lang="en-US" sz="900" dirty="0">
-                <a:solidFill>
-                  <a:srgbClr val="8B94A3"/>
-                </a:solidFill>
-                <a:latin typeface="Noto Sans SC" pitchFamily="34" charset="0"/>
-                <a:ea typeface="Noto Sans SC" pitchFamily="34" charset="-122"/>
-                <a:cs typeface="Noto Sans SC" pitchFamily="34" charset="-120"/>
-              </a:rPr>
-              <a:t>sleep</a:t>
-            </a:r>
-            <a:endParaRPr lang="en-US" sz="1300" dirty="0"/>
-          </a:p>
-          <a:p>
-            <a:pPr algn="l" indent="0" marL="0">
-              <a:buNone/>
-            </a:pPr>
-            <a:r>
-              <a:rPr lang="en-US" sz="1500" b="1" dirty="0">
-                <a:solidFill>
-                  <a:srgbClr val="1E2A38"/>
-                </a:solidFill>
-                <a:latin typeface="Noto Sans SC" pitchFamily="34" charset="0"/>
-                <a:ea typeface="Noto Sans SC" pitchFamily="34" charset="-122"/>
-                <a:cs typeface="Noto Sans SC" pitchFamily="34" charset="-120"/>
-              </a:rPr>
-              <a:t>觉</a:t>
-            </a:r>
-            <a:pPr algn="l" indent="0" marL="0">
-              <a:buNone/>
-            </a:pPr>
-            <a:r>
-              <a:rPr lang="en-US" sz="1300" dirty="0">
-                <a:solidFill>
-                  <a:srgbClr val="1E2A38"/>
-                </a:solidFill>
-                <a:latin typeface="Noto Sans SC" pitchFamily="34" charset="0"/>
-                <a:ea typeface="Noto Sans SC" pitchFamily="34" charset="-122"/>
-                <a:cs typeface="Noto Sans SC" pitchFamily="34" charset="-120"/>
-              </a:rPr>
-              <a:t> </a:t>
-            </a:r>
-            <a:pPr algn="l" indent="0" marL="0">
-              <a:buNone/>
-            </a:pPr>
-            <a:r>
-              <a:rPr lang="en-US" sz="1300" dirty="0">
-                <a:solidFill>
-                  <a:srgbClr val="3A7D8C"/>
-                </a:solidFill>
-                <a:latin typeface="Noto Sans SC" pitchFamily="34" charset="0"/>
-                <a:ea typeface="Noto Sans SC" pitchFamily="34" charset="-122"/>
-                <a:cs typeface="Noto Sans SC" pitchFamily="34" charset="-120"/>
-              </a:rPr>
-              <a:t>jiào</a:t>
-            </a:r>
-            <a:endParaRPr lang="en-US" sz="1300" dirty="0"/>
-          </a:p>
-          <a:p>
-            <a:pPr algn="l" indent="0" marL="0">
-              <a:buNone/>
-            </a:pPr>
-            <a:r>
-              <a:rPr lang="en-US" sz="900" dirty="0">
-                <a:solidFill>
-                  <a:srgbClr val="8B94A3"/>
-                </a:solidFill>
-                <a:latin typeface="Noto Sans SC" pitchFamily="34" charset="0"/>
-                <a:ea typeface="Noto Sans SC" pitchFamily="34" charset="-122"/>
-                <a:cs typeface="Noto Sans SC" pitchFamily="34" charset="-120"/>
-              </a:rPr>
-              <a:t>sleep</a:t>
-            </a:r>
-            <a:endParaRPr lang="en-US" sz="1300" dirty="0"/>
-          </a:p>
-          <a:p>
-            <a:pPr algn="l" indent="0" marL="0">
-              <a:buNone/>
-            </a:pPr>
-            <a:r>
-              <a:rPr lang="en-US" sz="1500" b="1" dirty="0">
-                <a:solidFill>
-                  <a:srgbClr val="C8943E"/>
-                </a:solidFill>
-                <a:latin typeface="Noto Sans SC" pitchFamily="34" charset="0"/>
-                <a:ea typeface="Noto Sans SC" pitchFamily="34" charset="-122"/>
-                <a:cs typeface="Noto Sans SC" pitchFamily="34" charset="-120"/>
-              </a:rPr>
-              <a:t>睡觉</a:t>
-            </a:r>
-            <a:pPr algn="l" indent="0" marL="0">
-              <a:buNone/>
-            </a:pPr>
-            <a:r>
-              <a:rPr lang="en-US" sz="1300" b="1" dirty="0">
-                <a:solidFill>
-                  <a:srgbClr val="C8943E"/>
-                </a:solidFill>
-                <a:latin typeface="Noto Sans SC" pitchFamily="34" charset="0"/>
-                <a:ea typeface="Noto Sans SC" pitchFamily="34" charset="-122"/>
-                <a:cs typeface="Noto Sans SC" pitchFamily="34" charset="-120"/>
-              </a:rPr>
-              <a:t> </a:t>
-            </a:r>
-            <a:pPr algn="l" indent="0" marL="0">
-              <a:buNone/>
-            </a:pPr>
             <a:r>
               <a:rPr lang="en-US" sz="1300" b="1" dirty="0">
                 <a:solidFill>
@@ -15105,12 +14757,6 @@
               </a:rPr>
               <a:t>Notice: </a:t>
             </a:r>
-            <a:pPr algn="l" indent="0" marL="0">
-              <a:spcBef>
-                <a:spcPts val="1400"/>
-              </a:spcBef>
-              <a:buNone/>
-            </a:pPr>
             <a:r>
               <a:rPr lang="en-US" sz="1200" b="1" dirty="0">
                 <a:solidFill>
@@ -15122,12 +14768,6 @@
               </a:rPr>
               <a:t>起床</a:t>
             </a:r>
-            <a:pPr algn="l" indent="0" marL="0">
-              <a:spcBef>
-                <a:spcPts val="1400"/>
-              </a:spcBef>
-              <a:buNone/>
-            </a:pPr>
             <a:r>
               <a:rPr lang="en-US" sz="1200" dirty="0">
                 <a:solidFill>
@@ -15139,12 +14779,6 @@
               </a:rPr>
               <a:t> uses the </a:t>
             </a:r>
-            <a:pPr algn="l" indent="0" marL="0">
-              <a:spcBef>
-                <a:spcPts val="1400"/>
-              </a:spcBef>
-              <a:buNone/>
-            </a:pPr>
             <a:r>
               <a:rPr lang="en-US" sz="1200" b="1" dirty="0">
                 <a:solidFill>
@@ -15156,12 +14790,6 @@
               </a:rPr>
               <a:t>走 (zǒu)</a:t>
             </a:r>
-            <a:pPr algn="l" indent="0" marL="0">
-              <a:spcBef>
-                <a:spcPts val="1400"/>
-              </a:spcBef>
-              <a:buNone/>
-            </a:pPr>
             <a:r>
               <a:rPr lang="en-US" sz="1200" dirty="0">
                 <a:solidFill>
@@ -15343,9 +14971,6 @@
               </a:rPr>
               <a:t>L4 · 起居动词</a:t>
             </a:r>
-            <a:pPr algn="l" indent="0" marL="0">
-              <a:buNone/>
-            </a:pPr>
             <a:r>
               <a:rPr lang="en-US" sz="900" b="1" dirty="0">
                 <a:solidFill>
@@ -15357,9 +14982,6 @@
               </a:rPr>
               <a:t> |</a:t>
             </a:r>
-            <a:pPr algn="l" indent="0" marL="0">
-              <a:buNone/>
-            </a:pPr>
             <a:r>
               <a:rPr lang="en-US" sz="900" dirty="0">
                 <a:solidFill>
@@ -15640,10 +15262,35 @@
               </a:rPr>
               <a:t>起床</a:t>
             </a:r>
+            <a:r>
+              <a:rPr lang="en-US" sz="1400" b="1" dirty="0">
+                <a:solidFill>
+                  <a:srgbClr val="1E2A38"/>
+                </a:solidFill>
+                <a:latin typeface="Noto Sans SC" pitchFamily="34" charset="0"/>
+                <a:ea typeface="Noto Sans SC" pitchFamily="34" charset="-122"/>
+                <a:cs typeface="Noto Sans SC" pitchFamily="34" charset="-120"/>
+              </a:rPr>
+              <a:t>我早上六点半起床。</a:t>
+            </a:r>
+            <a:endParaRPr lang="en-US" sz="1200" dirty="0"/>
+          </a:p>
+          <a:p>
             <a:pPr algn="l" indent="0" marL="0">
               <a:buNone/>
             </a:pPr>
             <a:r>
+              <a:rPr lang="en-US" sz="900" b="1" dirty="0">
+                <a:solidFill>
+                  <a:srgbClr val="C8943E"/>
+                </a:solidFill>
+                <a:latin typeface="Noto Sans SC" pitchFamily="34" charset="0"/>
+                <a:ea typeface="Noto Sans SC" pitchFamily="34" charset="-122"/>
+                <a:cs typeface="Noto Sans SC" pitchFamily="34" charset="-120"/>
+              </a:rPr>
+              <a:t>吃早饭</a:t>
+            </a:r>
+            <a:r>
               <a:rPr lang="en-US" sz="1400" b="1" dirty="0">
                 <a:solidFill>
                   <a:srgbClr val="1E2A38"/>
@@ -15652,7 +15299,7 @@
                 <a:ea typeface="Noto Sans SC" pitchFamily="34" charset="-122"/>
                 <a:cs typeface="Noto Sans SC" pitchFamily="34" charset="-120"/>
               </a:rPr>
-              <a:t>我早上六点半起床。</a:t>
+              <a:t>我六点三刻吃早饭。</a:t>
             </a:r>
             <a:endParaRPr lang="en-US" sz="1200" dirty="0"/>
           </a:p>
@@ -15669,12 +15316,37 @@
                 <a:ea typeface="Noto Sans SC" pitchFamily="34" charset="-122"/>
                 <a:cs typeface="Noto Sans SC" pitchFamily="34" charset="-120"/>
               </a:rPr>
-              <a:t>吃早饭</a:t>
-            </a:r>
+              <a:t>去上学</a:t>
+            </a:r>
+            <a:r>
+              <a:rPr lang="en-US" sz="1400" b="1" dirty="0">
+                <a:solidFill>
+                  <a:srgbClr val="1E2A38"/>
+                </a:solidFill>
+                <a:latin typeface="Noto Sans SC" pitchFamily="34" charset="0"/>
+                <a:ea typeface="Noto Sans SC" pitchFamily="34" charset="-122"/>
+                <a:cs typeface="Noto Sans SC" pitchFamily="34" charset="-120"/>
+              </a:rPr>
+              <a:t>我七点一刻去上学。</a:t>
+            </a:r>
+            <a:endParaRPr lang="en-US" sz="1200" dirty="0"/>
+          </a:p>
+          <a:p>
             <a:pPr algn="l" indent="0" marL="0">
               <a:buNone/>
             </a:pPr>
             <a:r>
+              <a:rPr lang="en-US" sz="900" b="1" dirty="0">
+                <a:solidFill>
+                  <a:srgbClr val="C8943E"/>
+                </a:solidFill>
+                <a:latin typeface="Noto Sans SC" pitchFamily="34" charset="0"/>
+                <a:ea typeface="Noto Sans SC" pitchFamily="34" charset="-122"/>
+                <a:cs typeface="Noto Sans SC" pitchFamily="34" charset="-120"/>
+              </a:rPr>
+              <a:t>上课</a:t>
+            </a:r>
+            <a:r>
               <a:rPr lang="en-US" sz="1400" b="1" dirty="0">
                 <a:solidFill>
                   <a:srgbClr val="1E2A38"/>
@@ -15683,7 +15355,7 @@
                 <a:ea typeface="Noto Sans SC" pitchFamily="34" charset="-122"/>
                 <a:cs typeface="Noto Sans SC" pitchFamily="34" charset="-120"/>
               </a:rPr>
-              <a:t>我六点三刻吃早饭。</a:t>
+              <a:t>我们八点上课。</a:t>
             </a:r>
             <a:endParaRPr lang="en-US" sz="1200" dirty="0"/>
           </a:p>
@@ -15700,29 +15372,26 @@
                 <a:ea typeface="Noto Sans SC" pitchFamily="34" charset="-122"/>
                 <a:cs typeface="Noto Sans SC" pitchFamily="34" charset="-120"/>
               </a:rPr>
-              <a:t>去上学</a:t>
-            </a:r>
+              <a:t>放学</a:t>
+            </a:r>
+            <a:r>
+              <a:rPr lang="en-US" sz="1400" b="1" dirty="0">
+                <a:solidFill>
+                  <a:srgbClr val="1E2A38"/>
+                </a:solidFill>
+                <a:latin typeface="Noto Sans SC" pitchFamily="34" charset="0"/>
+                <a:ea typeface="Noto Sans SC" pitchFamily="34" charset="-122"/>
+                <a:cs typeface="Noto Sans SC" pitchFamily="34" charset="-120"/>
+              </a:rPr>
+              <a:t>我们下午三点半放学。</a:t>
+            </a:r>
+            <a:endParaRPr lang="en-US" sz="1200" dirty="0"/>
+          </a:p>
+          <a:p>
             <a:pPr algn="l" indent="0" marL="0">
               <a:buNone/>
             </a:pPr>
             <a:r>
-              <a:rPr lang="en-US" sz="1400" b="1" dirty="0">
-                <a:solidFill>
-                  <a:srgbClr val="1E2A38"/>
-                </a:solidFill>
-                <a:latin typeface="Noto Sans SC" pitchFamily="34" charset="0"/>
-                <a:ea typeface="Noto Sans SC" pitchFamily="34" charset="-122"/>
-                <a:cs typeface="Noto Sans SC" pitchFamily="34" charset="-120"/>
-              </a:rPr>
-              <a:t>我七点一刻去上学。</a:t>
-            </a:r>
-            <a:endParaRPr lang="en-US" sz="1200" dirty="0"/>
-          </a:p>
-          <a:p>
-            <a:pPr algn="l" indent="0" marL="0">
-              <a:buNone/>
-            </a:pPr>
-            <a:r>
               <a:rPr lang="en-US" sz="900" b="1" dirty="0">
                 <a:solidFill>
                   <a:srgbClr val="C8943E"/>
@@ -15731,73 +15400,8 @@
                 <a:ea typeface="Noto Sans SC" pitchFamily="34" charset="-122"/>
                 <a:cs typeface="Noto Sans SC" pitchFamily="34" charset="-120"/>
               </a:rPr>
-              <a:t>上课</a:t>
-            </a:r>
-            <a:pPr algn="l" indent="0" marL="0">
-              <a:buNone/>
-            </a:pPr>
-            <a:r>
-              <a:rPr lang="en-US" sz="1400" b="1" dirty="0">
-                <a:solidFill>
-                  <a:srgbClr val="1E2A38"/>
-                </a:solidFill>
-                <a:latin typeface="Noto Sans SC" pitchFamily="34" charset="0"/>
-                <a:ea typeface="Noto Sans SC" pitchFamily="34" charset="-122"/>
-                <a:cs typeface="Noto Sans SC" pitchFamily="34" charset="-120"/>
-              </a:rPr>
-              <a:t>我们八点上课。</a:t>
-            </a:r>
-            <a:endParaRPr lang="en-US" sz="1200" dirty="0"/>
-          </a:p>
-          <a:p>
-            <a:pPr algn="l" indent="0" marL="0">
-              <a:buNone/>
-            </a:pPr>
-            <a:r>
-              <a:rPr lang="en-US" sz="900" b="1" dirty="0">
-                <a:solidFill>
-                  <a:srgbClr val="C8943E"/>
-                </a:solidFill>
-                <a:latin typeface="Noto Sans SC" pitchFamily="34" charset="0"/>
-                <a:ea typeface="Noto Sans SC" pitchFamily="34" charset="-122"/>
-                <a:cs typeface="Noto Sans SC" pitchFamily="34" charset="-120"/>
-              </a:rPr>
-              <a:t>放学</a:t>
-            </a:r>
-            <a:pPr algn="l" indent="0" marL="0">
-              <a:buNone/>
-            </a:pPr>
-            <a:r>
-              <a:rPr lang="en-US" sz="1400" b="1" dirty="0">
-                <a:solidFill>
-                  <a:srgbClr val="1E2A38"/>
-                </a:solidFill>
-                <a:latin typeface="Noto Sans SC" pitchFamily="34" charset="0"/>
-                <a:ea typeface="Noto Sans SC" pitchFamily="34" charset="-122"/>
-                <a:cs typeface="Noto Sans SC" pitchFamily="34" charset="-120"/>
-              </a:rPr>
-              <a:t>我们下午三点半放学。</a:t>
-            </a:r>
-            <a:endParaRPr lang="en-US" sz="1200" dirty="0"/>
-          </a:p>
-          <a:p>
-            <a:pPr algn="l" indent="0" marL="0">
-              <a:buNone/>
-            </a:pPr>
-            <a:r>
-              <a:rPr lang="en-US" sz="900" b="1" dirty="0">
-                <a:solidFill>
-                  <a:srgbClr val="C8943E"/>
-                </a:solidFill>
-                <a:latin typeface="Noto Sans SC" pitchFamily="34" charset="0"/>
-                <a:ea typeface="Noto Sans SC" pitchFamily="34" charset="-122"/>
-                <a:cs typeface="Noto Sans SC" pitchFamily="34" charset="-120"/>
-              </a:rPr>
               <a:t>睡觉</a:t>
             </a:r>
-            <a:pPr algn="l" indent="0" marL="0">
-              <a:buNone/>
-            </a:pPr>
             <a:r>
               <a:rPr lang="en-US" sz="1400" b="1" dirty="0">
                 <a:solidFill>
@@ -16121,9 +15725,6 @@
               </a:rPr>
               <a:t>L4 · 起居动词</a:t>
             </a:r>
-            <a:pPr algn="l" indent="0" marL="0">
-              <a:buNone/>
-            </a:pPr>
             <a:r>
               <a:rPr lang="en-US" sz="900" b="1" dirty="0">
                 <a:solidFill>
@@ -16135,9 +15736,6 @@
               </a:rPr>
               <a:t> |</a:t>
             </a:r>
-            <a:pPr algn="l" indent="0" marL="0">
-              <a:buNone/>
-            </a:pPr>
             <a:r>
               <a:rPr lang="en-US" sz="900" dirty="0">
                 <a:solidFill>
@@ -16340,9 +15938,6 @@
               </a:rPr>
               <a:t>How do you say </a:t>
             </a:r>
-            <a:pPr algn="l" indent="0" marL="0">
-              <a:buNone/>
-            </a:pPr>
             <a:r>
               <a:rPr lang="en-US" sz="1300" b="1" dirty="0">
                 <a:solidFill>
@@ -16354,9 +15949,6 @@
               </a:rPr>
               <a:t>"eat breakfast"</a:t>
             </a:r>
-            <a:pPr algn="l" indent="0" marL="0">
-              <a:buNone/>
-            </a:pPr>
             <a:r>
               <a:rPr lang="en-US" sz="1300" dirty="0">
                 <a:solidFill>
@@ -16478,9 +16070,6 @@
               </a:rPr>
               <a:t>What's the difference between </a:t>
             </a:r>
-            <a:pPr algn="l" indent="0" marL="0">
-              <a:buNone/>
-            </a:pPr>
             <a:r>
               <a:rPr lang="en-US" sz="1300" b="1" dirty="0">
                 <a:solidFill>
@@ -16492,9 +16081,6 @@
               </a:rPr>
               <a:t>上学</a:t>
             </a:r>
-            <a:pPr algn="l" indent="0" marL="0">
-              <a:buNone/>
-            </a:pPr>
             <a:r>
               <a:rPr lang="en-US" sz="1300" dirty="0">
                 <a:solidFill>
@@ -16506,9 +16092,6 @@
               </a:rPr>
               <a:t> and </a:t>
             </a:r>
-            <a:pPr algn="l" indent="0" marL="0">
-              <a:buNone/>
-            </a:pPr>
             <a:r>
               <a:rPr lang="en-US" sz="1300" b="1" dirty="0">
                 <a:solidFill>
@@ -16520,9 +16103,6 @@
               </a:rPr>
               <a:t>上课</a:t>
             </a:r>
-            <a:pPr algn="l" indent="0" marL="0">
-              <a:buNone/>
-            </a:pPr>
             <a:r>
               <a:rPr lang="en-US" sz="1300" dirty="0">
                 <a:solidFill>
@@ -16644,9 +16224,6 @@
               </a:rPr>
               <a:t>Which verb pairs with </a:t>
             </a:r>
-            <a:pPr algn="l" indent="0" marL="0">
-              <a:buNone/>
-            </a:pPr>
             <a:r>
               <a:rPr lang="en-US" sz="1300" b="1" dirty="0">
                 <a:solidFill>
@@ -16658,9 +16235,6 @@
               </a:rPr>
               <a:t>觉</a:t>
             </a:r>
-            <a:pPr algn="l" indent="0" marL="0">
-              <a:buNone/>
-            </a:pPr>
             <a:r>
               <a:rPr lang="en-US" sz="1300" dirty="0">
                 <a:solidFill>
@@ -16915,9 +16489,6 @@
               </a:rPr>
               <a:t>L4 · 起居动词</a:t>
             </a:r>
-            <a:pPr algn="l" indent="0" marL="0">
-              <a:buNone/>
-            </a:pPr>
             <a:r>
               <a:rPr lang="en-US" sz="900" b="1" dirty="0">
                 <a:solidFill>
@@ -16929,9 +16500,6 @@
               </a:rPr>
               <a:t> |</a:t>
             </a:r>
-            <a:pPr algn="l" indent="0" marL="0">
-              <a:buNone/>
-            </a:pPr>
             <a:r>
               <a:rPr lang="en-US" sz="900" dirty="0">
                 <a:solidFill>
@@ -17157,9 +16725,6 @@
               </a:rPr>
               <a:t>How do you say </a:t>
             </a:r>
-            <a:pPr algn="l" indent="0" marL="0">
-              <a:buNone/>
-            </a:pPr>
             <a:r>
               <a:rPr lang="en-US" sz="1300" b="1" dirty="0">
                 <a:solidFill>
@@ -17171,9 +16736,6 @@
               </a:rPr>
               <a:t>"eat breakfast"</a:t>
             </a:r>
-            <a:pPr algn="l" indent="0" marL="0">
-              <a:buNone/>
-            </a:pPr>
             <a:r>
               <a:rPr lang="en-US" sz="1300" dirty="0">
                 <a:solidFill>
@@ -17357,9 +16919,6 @@
               </a:rPr>
               <a:t>What's the difference between </a:t>
             </a:r>
-            <a:pPr algn="l" indent="0" marL="0">
-              <a:buNone/>
-            </a:pPr>
             <a:r>
               <a:rPr lang="en-US" sz="1300" b="1" dirty="0">
                 <a:solidFill>
@@ -17371,9 +16930,6 @@
               </a:rPr>
               <a:t>上学</a:t>
             </a:r>
-            <a:pPr algn="l" indent="0" marL="0">
-              <a:buNone/>
-            </a:pPr>
             <a:r>
               <a:rPr lang="en-US" sz="1300" dirty="0">
                 <a:solidFill>
@@ -17385,9 +16941,6 @@
               </a:rPr>
               <a:t> and </a:t>
             </a:r>
-            <a:pPr algn="l" indent="0" marL="0">
-              <a:buNone/>
-            </a:pPr>
             <a:r>
               <a:rPr lang="en-US" sz="1300" b="1" dirty="0">
                 <a:solidFill>
@@ -17399,9 +16952,6 @@
               </a:rPr>
               <a:t>上课</a:t>
             </a:r>
-            <a:pPr algn="l" indent="0" marL="0">
-              <a:buNone/>
-            </a:pPr>
             <a:r>
               <a:rPr lang="en-US" sz="1300" dirty="0">
                 <a:solidFill>
@@ -17602,9 +17152,6 @@
               </a:rPr>
               <a:t>Which verb pairs with </a:t>
             </a:r>
-            <a:pPr algn="l" indent="0" marL="0">
-              <a:buNone/>
-            </a:pPr>
             <a:r>
               <a:rPr lang="en-US" sz="1300" b="1" dirty="0">
                 <a:solidFill>
@@ -17616,9 +17163,6 @@
               </a:rPr>
               <a:t>觉</a:t>
             </a:r>
-            <a:pPr algn="l" indent="0" marL="0">
-              <a:buNone/>
-            </a:pPr>
             <a:r>
               <a:rPr lang="en-US" sz="1300" dirty="0">
                 <a:solidFill>
